--- a/Web/NodeJS-Notes.pptx
+++ b/Web/NodeJS-Notes.pptx
@@ -3810,84 +3810,129 @@
           </a:xfrm>
         </p:spPr>
         <p:txBody>
-          <a:bodyPr/>
-          <a:p>
-            <a:r>
-              <a:rPr lang="zh-CN" altLang="en-US"/>
+          <a:bodyPr>
+            <a:normAutofit/>
+          </a:bodyPr>
+          <a:p>
+            <a:r>
+              <a:rPr lang="en-US" altLang="zh-CN" sz="1800"/>
+              <a:t>Intro</a:t>
+            </a:r>
+            <a:endParaRPr lang="en-US" altLang="zh-CN" sz="1800"/>
+          </a:p>
+          <a:p>
+            <a:pPr lvl="1"/>
+            <a:r>
+              <a:rPr lang="zh-CN" altLang="en-US" sz="1600"/>
               <a:t>https://github.com/pnpm/pnpm</a:t>
             </a:r>
-            <a:endParaRPr lang="zh-CN" altLang="en-US"/>
-          </a:p>
-          <a:p>
-            <a:r>
-              <a:rPr lang="en-US" altLang="zh-CN"/>
+            <a:endParaRPr lang="zh-CN" altLang="en-US" sz="1600"/>
+          </a:p>
+          <a:p>
+            <a:pPr lvl="1" algn="l">
+              <a:buClrTx/>
+              <a:buSzTx/>
+            </a:pPr>
+            <a:r>
+              <a:rPr lang="zh-CN" altLang="en-US" sz="1600"/>
+              <a:t>node: '&gt;=18.12'</a:t>
+            </a:r>
+            <a:endParaRPr lang="zh-CN" altLang="en-US" sz="1600"/>
+          </a:p>
+          <a:p>
+            <a:r>
+              <a:rPr lang="en-US" altLang="zh-CN" sz="1800"/>
               <a:t>Install</a:t>
             </a:r>
-            <a:endParaRPr lang="en-US" altLang="zh-CN"/>
-          </a:p>
-          <a:p>
-            <a:pPr lvl="1"/>
-            <a:r>
-              <a:rPr lang="en-US" altLang="zh-CN"/>
+            <a:endParaRPr lang="en-US" altLang="zh-CN" sz="1800"/>
+          </a:p>
+          <a:p>
+            <a:pPr lvl="1"/>
+            <a:r>
+              <a:rPr lang="en-US" altLang="zh-CN" sz="1600"/>
               <a:t>Windows</a:t>
             </a:r>
-            <a:endParaRPr lang="en-US" altLang="zh-CN"/>
+            <a:endParaRPr lang="en-US" altLang="zh-CN" sz="1600"/>
           </a:p>
           <a:p>
             <a:pPr lvl="2"/>
             <a:r>
-              <a:rPr lang="en-US" altLang="zh-CN"/>
+              <a:rPr lang="en-US" altLang="zh-CN" sz="1400"/>
               <a:t>Using PowerShell, iwr https://get.pnpm.io/install.ps1 -useb | iex</a:t>
             </a:r>
-            <a:endParaRPr lang="en-US" altLang="zh-CN"/>
-          </a:p>
-          <a:p>
-            <a:pPr lvl="1"/>
-            <a:r>
-              <a:rPr lang="en-US" altLang="zh-CN"/>
+            <a:endParaRPr lang="en-US" altLang="zh-CN" sz="1400"/>
+          </a:p>
+          <a:p>
+            <a:pPr lvl="1"/>
+            <a:r>
+              <a:rPr lang="en-US" altLang="zh-CN" sz="1600"/>
               <a:t>POSIX</a:t>
             </a:r>
-            <a:endParaRPr lang="en-US" altLang="zh-CN"/>
+            <a:endParaRPr lang="en-US" altLang="zh-CN" sz="1600"/>
           </a:p>
           <a:p>
             <a:pPr lvl="2"/>
             <a:r>
-              <a:rPr lang="en-US" altLang="zh-CN"/>
+              <a:rPr lang="en-US" altLang="zh-CN" sz="1400"/>
               <a:t>curl -fsSL https://get.pnpm.io/install.sh | sh -</a:t>
             </a:r>
-            <a:endParaRPr lang="en-US" altLang="zh-CN"/>
-          </a:p>
-          <a:p>
-            <a:pPr lvl="1"/>
-            <a:r>
-              <a:rPr lang="en-US" altLang="zh-CN"/>
+            <a:endParaRPr lang="en-US" altLang="zh-CN" sz="1400"/>
+          </a:p>
+          <a:p>
+            <a:pPr lvl="1"/>
+            <a:r>
+              <a:rPr lang="en-US" altLang="zh-CN" sz="1600"/>
               <a:t>npm install -g pnpm</a:t>
             </a:r>
-            <a:endParaRPr lang="en-US" altLang="zh-CN"/>
+            <a:endParaRPr lang="en-US" altLang="zh-CN" sz="1600"/>
           </a:p>
           <a:p>
             <a:pPr lvl="0"/>
             <a:r>
-              <a:rPr lang="en-US" altLang="zh-CN"/>
+              <a:rPr lang="en-US" altLang="zh-CN" sz="1800"/>
               <a:t>Usage</a:t>
             </a:r>
-            <a:endParaRPr lang="en-US" altLang="zh-CN"/>
-          </a:p>
-          <a:p>
-            <a:pPr lvl="1"/>
-            <a:r>
-              <a:rPr lang="en-US" altLang="zh-CN"/>
+            <a:endParaRPr lang="en-US" altLang="zh-CN" sz="1800"/>
+          </a:p>
+          <a:p>
+            <a:pPr lvl="1"/>
+            <a:r>
+              <a:rPr lang="en-US" altLang="zh-CN" sz="1600"/>
+              <a:t>pnpm config get registry</a:t>
+            </a:r>
+            <a:endParaRPr lang="en-US" altLang="zh-CN" sz="1600"/>
+          </a:p>
+          <a:p>
+            <a:pPr lvl="1"/>
+            <a:r>
+              <a:rPr lang="en-US" altLang="zh-CN" sz="1600"/>
+              <a:t>pnpm config set registry https://registry.npmmirror.com/</a:t>
+            </a:r>
+            <a:endParaRPr lang="en-US" altLang="zh-CN" sz="1600"/>
+          </a:p>
+          <a:p>
+            <a:pPr lvl="1"/>
+            <a:r>
+              <a:rPr lang="en-US" altLang="zh-CN" sz="1600"/>
               <a:t>pnpm install</a:t>
             </a:r>
-            <a:endParaRPr lang="en-US" altLang="zh-CN"/>
-          </a:p>
-          <a:p>
-            <a:pPr lvl="1"/>
-            <a:r>
-              <a:rPr lang="en-US" altLang="zh-CN"/>
+            <a:endParaRPr lang="en-US" altLang="zh-CN" sz="1600"/>
+          </a:p>
+          <a:p>
+            <a:pPr lvl="1"/>
+            <a:r>
+              <a:rPr lang="en-US" altLang="zh-CN" sz="1600"/>
+              <a:t>pnpm approve-builds</a:t>
+            </a:r>
+            <a:endParaRPr lang="en-US" altLang="zh-CN" sz="1600"/>
+          </a:p>
+          <a:p>
+            <a:pPr lvl="1"/>
+            <a:r>
+              <a:rPr lang="en-US" altLang="zh-CN" sz="1600"/>
               <a:t>pnpm add {package}</a:t>
             </a:r>
-            <a:endParaRPr lang="en-US" altLang="zh-CN"/>
+            <a:endParaRPr lang="en-US" altLang="zh-CN" sz="1600"/>
           </a:p>
         </p:txBody>
       </p:sp>
@@ -6388,9 +6433,16 @@
             <p:ph idx="1"/>
           </p:nvPr>
         </p:nvSpPr>
-        <p:spPr/>
-        <p:txBody>
-          <a:bodyPr/>
+        <p:spPr>
+          <a:xfrm>
+            <a:off x="838200" y="1211580"/>
+            <a:ext cx="6137910" cy="4549140"/>
+          </a:xfrm>
+        </p:spPr>
+        <p:txBody>
+          <a:bodyPr>
+            <a:normAutofit fontScale="90000" lnSpcReduction="20000"/>
+          </a:bodyPr>
           <a:p>
             <a:r>
               <a:rPr lang="en-US" altLang="zh-CN"/>
@@ -6475,6 +6527,120 @@
               <a:t>https://docs.npmjs.com/common-errors/</a:t>
             </a:r>
             <a:endParaRPr lang="en-US" altLang="zh-CN"/>
+          </a:p>
+          <a:p>
+            <a:pPr lvl="0"/>
+            <a:r>
+              <a:rPr lang="en-US" altLang="zh-CN"/>
+              <a:t>sharp</a:t>
+            </a:r>
+            <a:endParaRPr lang="en-US" altLang="zh-CN"/>
+          </a:p>
+          <a:p>
+            <a:pPr lvl="1"/>
+            <a:r>
+              <a:rPr lang="en-US" altLang="zh-CN"/>
+              <a:t>https://www.cnblogs.com/sugartang/p/17296559.html</a:t>
+            </a:r>
+            <a:endParaRPr lang="en-US" altLang="zh-CN"/>
+          </a:p>
+          <a:p>
+            <a:pPr lvl="1"/>
+            <a:r>
+              <a:rPr lang="en-US" altLang="zh-CN"/>
+              <a:t>create .yarnrc</a:t>
+            </a:r>
+            <a:endParaRPr lang="en-US" altLang="zh-CN"/>
+          </a:p>
+        </p:txBody>
+      </p:sp>
+      <p:sp>
+        <p:nvSpPr>
+          <p:cNvPr id="4" name="文本框 3"/>
+          <p:cNvSpPr txBox="1"/>
+          <p:nvPr/>
+        </p:nvSpPr>
+        <p:spPr>
+          <a:xfrm>
+            <a:off x="7934325" y="1320800"/>
+            <a:ext cx="3199130" cy="3969385"/>
+          </a:xfrm>
+          <a:prstGeom prst="rect">
+            <a:avLst/>
+          </a:prstGeom>
+          <a:noFill/>
+          <a:ln>
+            <a:solidFill>
+              <a:srgbClr val="C00000"/>
+            </a:solidFill>
+          </a:ln>
+        </p:spPr>
+        <p:txBody>
+          <a:bodyPr wrap="square" rtlCol="0">
+            <a:spAutoFit/>
+          </a:bodyPr>
+          <a:p>
+            <a:r>
+              <a:rPr lang="zh-CN" altLang="en-US" sz="1200"/>
+              <a:t>registry "https://registry.npm.taobao.org"</a:t>
+            </a:r>
+            <a:endParaRPr lang="zh-CN" altLang="en-US" sz="1200"/>
+          </a:p>
+          <a:p>
+            <a:r>
+              <a:rPr lang="zh-CN" altLang="en-US" sz="1200"/>
+              <a:t>sass_binary_site "https://npm.taobao.org/mirrors/node-sass/"</a:t>
+            </a:r>
+            <a:endParaRPr lang="zh-CN" altLang="en-US" sz="1200"/>
+          </a:p>
+          <a:p>
+            <a:r>
+              <a:rPr lang="zh-CN" altLang="en-US" sz="1200"/>
+              <a:t>phantomjs_cdnurl "http://cnpmjs.org/downloads"</a:t>
+            </a:r>
+            <a:endParaRPr lang="zh-CN" altLang="en-US" sz="1200"/>
+          </a:p>
+          <a:p>
+            <a:r>
+              <a:rPr lang="zh-CN" altLang="en-US" sz="1200"/>
+              <a:t>electron_mirror "https://npm.taobao.org/mirrors/electron/"</a:t>
+            </a:r>
+            <a:endParaRPr lang="zh-CN" altLang="en-US" sz="1200"/>
+          </a:p>
+          <a:p>
+            <a:r>
+              <a:rPr lang="zh-CN" altLang="en-US" sz="1200"/>
+              <a:t>sqlite3_binary_host_mirror "https://foxgis.oss-cn-shanghai.aliyuncs.com/"</a:t>
+            </a:r>
+            <a:endParaRPr lang="zh-CN" altLang="en-US" sz="1200"/>
+          </a:p>
+          <a:p>
+            <a:r>
+              <a:rPr lang="zh-CN" altLang="en-US" sz="1200"/>
+              <a:t>profiler_binary_host_mirror "https://npm.taobao.org/mirrors/node-inspector/"</a:t>
+            </a:r>
+            <a:endParaRPr lang="zh-CN" altLang="en-US" sz="1200"/>
+          </a:p>
+          <a:p>
+            <a:r>
+              <a:rPr lang="zh-CN" altLang="en-US" sz="1200"/>
+              <a:t>chromedriver_cdnurl "https://cdn.npm.taobao.org/dist/chromedriver"</a:t>
+            </a:r>
+            <a:endParaRPr lang="zh-CN" altLang="en-US" sz="1200"/>
+          </a:p>
+          <a:p>
+            <a:r>
+              <a:rPr lang="zh-CN" altLang="en-US" sz="1200"/>
+              <a:t>sharp_binary_host "https://npm.taobao.org/mirrors/sharp"</a:t>
+            </a:r>
+            <a:endParaRPr lang="zh-CN" altLang="en-US" sz="1200"/>
+          </a:p>
+          <a:p>
+            <a:r>
+              <a:rPr lang="zh-CN" altLang="en-US" sz="1200"/>
+              <a:t>sharp_libvips_binary_host "https://npm.taobao.org/mirrors/sharp-libvips"</a:t>
+            </a:r>
+            <a:endParaRPr lang="zh-CN" altLang="en-US" sz="1200"/>
           </a:p>
         </p:txBody>
       </p:sp>
@@ -8075,10 +8241,10 @@
           </a:bodyPr>
           <a:p>
             <a:r>
-              <a:rPr lang="en-US" altLang="zh-CN" sz="1600"/>
+              <a:rPr lang="en-US" altLang="zh-CN" sz="1800"/>
               <a:t>References</a:t>
             </a:r>
-            <a:endParaRPr lang="en-US" altLang="zh-CN" sz="1600"/>
+            <a:endParaRPr lang="en-US" altLang="zh-CN" sz="1800"/>
           </a:p>
           <a:p>
             <a:pPr lvl="1"/>
@@ -8091,12 +8257,12 @@
           <a:p>
             <a:pPr lvl="0"/>
             <a:r>
-              <a:rPr lang="en-US" altLang="zh-CN" sz="1600">
+              <a:rPr lang="en-US" altLang="zh-CN" sz="1800">
                 <a:sym typeface="+mn-ea"/>
               </a:rPr>
               <a:t>Clean up packages</a:t>
             </a:r>
-            <a:endParaRPr lang="en-US" altLang="zh-CN" sz="1600">
+            <a:endParaRPr lang="en-US" altLang="zh-CN" sz="1800">
               <a:sym typeface="+mn-ea"/>
             </a:endParaRPr>
           </a:p>
@@ -8121,6 +8287,138 @@
             <a:endParaRPr lang="en-US" altLang="zh-CN" sz="1400">
               <a:sym typeface="+mn-ea"/>
             </a:endParaRPr>
+          </a:p>
+          <a:p>
+            <a:pPr lvl="0"/>
+            <a:r>
+              <a:rPr lang="en-US" altLang="zh-CN" sz="1800">
+                <a:sym typeface="+mn-ea"/>
+              </a:rPr>
+              <a:t>npx</a:t>
+            </a:r>
+            <a:endParaRPr lang="en-US" altLang="zh-CN" sz="1800">
+              <a:sym typeface="+mn-ea"/>
+            </a:endParaRPr>
+          </a:p>
+          <a:p>
+            <a:pPr lvl="1"/>
+            <a:r>
+              <a:rPr lang="en-US" altLang="zh-CN" sz="1600"/>
+              <a:t>Run a command from a local or remote</a:t>
+            </a:r>
+            <a:endParaRPr lang="en-US" altLang="zh-CN" sz="1600"/>
+          </a:p>
+          <a:p>
+            <a:pPr lvl="1"/>
+            <a:r>
+              <a:rPr lang="zh-CN" altLang="en-US" sz="1600"/>
+              <a:t>通过</a:t>
+            </a:r>
+            <a:r>
+              <a:rPr lang="en-US" altLang="zh-CN" sz="1600"/>
+              <a:t> npx</a:t>
+            </a:r>
+            <a:r>
+              <a:rPr lang="zh-CN" altLang="en-US" sz="1600"/>
+              <a:t>，可以避免将工具安装到全局环境中，从而减少潜在冲突和管理上的复杂性。</a:t>
+            </a:r>
+            <a:endParaRPr lang="zh-CN" altLang="en-US" sz="1600"/>
+          </a:p>
+          <a:p>
+            <a:pPr lvl="1"/>
+            <a:r>
+              <a:rPr lang="en-US" altLang="zh-CN" sz="1600"/>
+              <a:t>Logic</a:t>
+            </a:r>
+            <a:endParaRPr lang="en-US" altLang="zh-CN" sz="1600"/>
+          </a:p>
+          <a:p>
+            <a:pPr lvl="2"/>
+            <a:r>
+              <a:rPr lang="zh-CN" altLang="en-US" sz="1400"/>
+              <a:t>优先</a:t>
+            </a:r>
+            <a:r>
+              <a:rPr lang="en-US" altLang="zh-CN" sz="1400"/>
+              <a:t>node_modules/.bin </a:t>
+            </a:r>
+            <a:r>
+              <a:rPr lang="zh-CN" altLang="en-US" sz="1400"/>
+              <a:t>中找到的版本</a:t>
+            </a:r>
+            <a:endParaRPr lang="zh-CN" altLang="en-US" sz="1400"/>
+          </a:p>
+          <a:p>
+            <a:pPr lvl="2"/>
+            <a:r>
+              <a:rPr lang="zh-CN" altLang="en-US" sz="1400"/>
+              <a:t>如果没有找到，尝试从</a:t>
+            </a:r>
+            <a:r>
+              <a:rPr lang="en-US" altLang="zh-CN" sz="1400"/>
+              <a:t> npm </a:t>
+            </a:r>
+            <a:r>
+              <a:rPr lang="zh-CN" altLang="en-US" sz="1400"/>
+              <a:t>下载最新版本并执行。</a:t>
+            </a:r>
+            <a:endParaRPr lang="zh-CN" altLang="en-US" sz="1400"/>
+          </a:p>
+          <a:p>
+            <a:pPr lvl="2"/>
+            <a:r>
+              <a:rPr lang="zh-CN" altLang="en-US" sz="1400"/>
+              <a:t>默认情况下，</a:t>
+            </a:r>
+            <a:r>
+              <a:rPr lang="en-US" altLang="zh-CN" sz="1400"/>
+              <a:t>npx </a:t>
+            </a:r>
+            <a:r>
+              <a:rPr lang="zh-CN" altLang="en-US" sz="1400"/>
+              <a:t>不会在本地安装任何东西，除非明确指定了</a:t>
+            </a:r>
+            <a:r>
+              <a:rPr lang="en-US" altLang="zh-CN" sz="1400"/>
+              <a:t> --install </a:t>
+            </a:r>
+            <a:r>
+              <a:rPr lang="zh-CN" altLang="en-US" sz="1400"/>
+              <a:t>选项。</a:t>
+            </a:r>
+            <a:endParaRPr lang="zh-CN" altLang="en-US" sz="1400"/>
+          </a:p>
+          <a:p>
+            <a:pPr lvl="1"/>
+            <a:r>
+              <a:rPr lang="en-US" altLang="zh-CN" sz="1600"/>
+              <a:t>npm package</a:t>
+            </a:r>
+            <a:endParaRPr lang="en-US" altLang="zh-CN" sz="1600"/>
+          </a:p>
+          <a:p>
+            <a:pPr lvl="1"/>
+            <a:r>
+              <a:rPr lang="en-US" altLang="zh-CN" sz="1600"/>
+              <a:t>npx eslint .</a:t>
+            </a:r>
+            <a:endParaRPr lang="en-US" altLang="zh-CN" sz="1600"/>
+          </a:p>
+          <a:p>
+            <a:pPr lvl="1"/>
+            <a:r>
+              <a:rPr lang="en-US" altLang="zh-CN" sz="1600"/>
+              <a:t>npx @vue/cli create my-vue-app</a:t>
+            </a:r>
+            <a:endParaRPr lang="en-US" altLang="zh-CN" sz="1600"/>
+          </a:p>
+          <a:p>
+            <a:pPr lvl="1"/>
+            <a:r>
+              <a:rPr lang="en-US" altLang="zh-CN" sz="1600"/>
+              <a:t>npx create-react-app my-app</a:t>
+            </a:r>
+            <a:endParaRPr lang="en-US" altLang="zh-CN" sz="1600"/>
           </a:p>
         </p:txBody>
       </p:sp>
@@ -8664,12 +8962,12 @@
                         <a:buNone/>
                       </a:pPr>
                       <a:r>
-                        <a:rPr lang="en-US" altLang="zh-CN" sz="1200">
+                        <a:rPr lang="en-US" altLang="zh-CN" sz="1200" b="1">
                           <a:sym typeface="+mn-ea"/>
                         </a:rPr>
                         <a:t>npm view &lt;package-name&gt; versions</a:t>
                       </a:r>
-                      <a:endParaRPr lang="en-US" altLang="zh-CN" sz="1200"/>
+                      <a:endParaRPr lang="en-US" altLang="zh-CN" sz="1200" b="1"/>
                     </a:p>
                   </a:txBody>
                   <a:tcPr/>
@@ -8920,7 +9218,9 @@
         </p:nvSpPr>
         <p:spPr/>
         <p:txBody>
-          <a:bodyPr/>
+          <a:bodyPr>
+            <a:normAutofit lnSpcReduction="10000"/>
+          </a:bodyPr>
           <a:p>
             <a:pPr lvl="0"/>
             <a:r>
@@ -9026,6 +9326,22 @@
             <a:r>
               <a:rPr lang="en-US" altLang="zh-CN"/>
               <a:t>yarn list --pattern jszip</a:t>
+            </a:r>
+            <a:endParaRPr lang="en-US" altLang="zh-CN"/>
+          </a:p>
+          <a:p>
+            <a:pPr lvl="1"/>
+            <a:r>
+              <a:rPr lang="en-US" altLang="zh-CN"/>
+              <a:t>yarn info &lt;package-name&gt; versions --json | jq '.data'</a:t>
+            </a:r>
+            <a:endParaRPr lang="en-US" altLang="zh-CN"/>
+          </a:p>
+          <a:p>
+            <a:pPr lvl="2"/>
+            <a:r>
+              <a:rPr lang="en-US" altLang="zh-CN"/>
+              <a:t>list all available versions for a package</a:t>
             </a:r>
             <a:endParaRPr lang="en-US" altLang="zh-CN"/>
           </a:p>

--- a/Web/NodeJS-Notes.pptx
+++ b/Web/NodeJS-Notes.pptx
@@ -5,39 +5,41 @@
     <p:sldMasterId id="2147483648" r:id="rId1"/>
   </p:sldMasterIdLst>
   <p:notesMasterIdLst>
-    <p:notesMasterId r:id="rId25"/>
+    <p:notesMasterId r:id="rId27"/>
   </p:notesMasterIdLst>
   <p:handoutMasterIdLst>
-    <p:handoutMasterId r:id="rId26"/>
+    <p:handoutMasterId r:id="rId28"/>
   </p:handoutMasterIdLst>
   <p:sldIdLst>
     <p:sldId id="256" r:id="rId3"/>
     <p:sldId id="266" r:id="rId4"/>
-    <p:sldId id="283" r:id="rId5"/>
-    <p:sldId id="310" r:id="rId6"/>
-    <p:sldId id="273" r:id="rId7"/>
-    <p:sldId id="272" r:id="rId8"/>
-    <p:sldId id="274" r:id="rId9"/>
-    <p:sldId id="279" r:id="rId10"/>
-    <p:sldId id="300" r:id="rId11"/>
-    <p:sldId id="328" r:id="rId12"/>
-    <p:sldId id="268" r:id="rId13"/>
-    <p:sldId id="270" r:id="rId14"/>
-    <p:sldId id="291" r:id="rId15"/>
-    <p:sldId id="293" r:id="rId16"/>
-    <p:sldId id="292" r:id="rId17"/>
-    <p:sldId id="296" r:id="rId18"/>
-    <p:sldId id="301" r:id="rId19"/>
-    <p:sldId id="325" r:id="rId20"/>
-    <p:sldId id="342" r:id="rId21"/>
-    <p:sldId id="339" r:id="rId22"/>
-    <p:sldId id="298" r:id="rId23"/>
-    <p:sldId id="261" r:id="rId24"/>
+    <p:sldId id="344" r:id="rId5"/>
+    <p:sldId id="283" r:id="rId6"/>
+    <p:sldId id="310" r:id="rId7"/>
+    <p:sldId id="273" r:id="rId8"/>
+    <p:sldId id="272" r:id="rId9"/>
+    <p:sldId id="274" r:id="rId10"/>
+    <p:sldId id="279" r:id="rId11"/>
+    <p:sldId id="300" r:id="rId12"/>
+    <p:sldId id="328" r:id="rId13"/>
+    <p:sldId id="343" r:id="rId14"/>
+    <p:sldId id="268" r:id="rId15"/>
+    <p:sldId id="270" r:id="rId16"/>
+    <p:sldId id="291" r:id="rId17"/>
+    <p:sldId id="293" r:id="rId18"/>
+    <p:sldId id="292" r:id="rId19"/>
+    <p:sldId id="296" r:id="rId20"/>
+    <p:sldId id="301" r:id="rId21"/>
+    <p:sldId id="325" r:id="rId22"/>
+    <p:sldId id="342" r:id="rId23"/>
+    <p:sldId id="339" r:id="rId24"/>
+    <p:sldId id="298" r:id="rId25"/>
+    <p:sldId id="261" r:id="rId26"/>
   </p:sldIdLst>
   <p:sldSz cx="12192000" cy="6858000"/>
   <p:notesSz cx="6858000" cy="9144000"/>
   <p:custDataLst>
-    <p:tags r:id="rId30"/>
+    <p:tags r:id="rId32"/>
   </p:custDataLst>
   <p:defaultTextStyle>
     <a:defPPr>
@@ -3787,6 +3789,245 @@
           <a:p>
             <a:r>
               <a:rPr lang="en-US" altLang="zh-CN"/>
+              <a:t>Package Management - yarn</a:t>
+            </a:r>
+            <a:endParaRPr lang="en-US" altLang="zh-CN"/>
+          </a:p>
+        </p:txBody>
+      </p:sp>
+      <p:sp>
+        <p:nvSpPr>
+          <p:cNvPr id="3" name="内容占位符 2"/>
+          <p:cNvSpPr>
+            <a:spLocks noGrp="1"/>
+          </p:cNvSpPr>
+          <p:nvPr>
+            <p:ph idx="1"/>
+          </p:nvPr>
+        </p:nvSpPr>
+        <p:spPr>
+          <a:xfrm>
+            <a:off x="838200" y="1211580"/>
+            <a:ext cx="4963160" cy="5311140"/>
+          </a:xfrm>
+        </p:spPr>
+        <p:txBody>
+          <a:bodyPr>
+            <a:normAutofit fontScale="70000"/>
+          </a:bodyPr>
+          <a:p>
+            <a:pPr lvl="0"/>
+            <a:r>
+              <a:rPr lang="en-US" altLang="zh-CN" sz="2400">
+                <a:sym typeface="+mn-ea"/>
+              </a:rPr>
+              <a:t>yarn</a:t>
+            </a:r>
+            <a:endParaRPr lang="en-US" altLang="zh-CN" sz="2400"/>
+          </a:p>
+          <a:p>
+            <a:pPr lvl="1"/>
+            <a:r>
+              <a:rPr lang="en-US" altLang="zh-CN">
+                <a:sym typeface="+mn-ea"/>
+              </a:rPr>
+              <a:t>cnpm i -g yarn</a:t>
+            </a:r>
+            <a:endParaRPr lang="en-US" altLang="zh-CN">
+              <a:sym typeface="+mn-ea"/>
+            </a:endParaRPr>
+          </a:p>
+          <a:p>
+            <a:pPr lvl="1"/>
+            <a:r>
+              <a:rPr lang="en-US" altLang="zh-CN">
+                <a:sym typeface="+mn-ea"/>
+              </a:rPr>
+              <a:t>yarn config list</a:t>
+            </a:r>
+            <a:endParaRPr lang="en-US" altLang="zh-CN">
+              <a:sym typeface="+mn-ea"/>
+            </a:endParaRPr>
+          </a:p>
+          <a:p>
+            <a:pPr lvl="2"/>
+            <a:r>
+              <a:rPr lang="en-US" altLang="zh-CN" sz="1800">
+                <a:sym typeface="+mn-ea"/>
+              </a:rPr>
+              <a:t>~/.yarnrc</a:t>
+            </a:r>
+            <a:endParaRPr lang="en-US" altLang="zh-CN"/>
+          </a:p>
+          <a:p>
+            <a:pPr lvl="1"/>
+            <a:r>
+              <a:rPr lang="en-US" altLang="zh-CN">
+                <a:sym typeface="+mn-ea"/>
+              </a:rPr>
+              <a:t>yarn config set registry http://registry.npm.taobao.org</a:t>
+            </a:r>
+            <a:endParaRPr lang="en-US" altLang="zh-CN">
+              <a:sym typeface="+mn-ea"/>
+            </a:endParaRPr>
+          </a:p>
+          <a:p>
+            <a:pPr lvl="1"/>
+            <a:r>
+              <a:rPr lang="en-US" altLang="zh-CN">
+                <a:sym typeface="+mn-ea"/>
+              </a:rPr>
+              <a:t>yarn config set registry http://registry.yarnpkg.com</a:t>
+            </a:r>
+            <a:endParaRPr lang="en-US" altLang="zh-CN">
+              <a:sym typeface="+mn-ea"/>
+            </a:endParaRPr>
+          </a:p>
+          <a:p>
+            <a:pPr lvl="1"/>
+            <a:r>
+              <a:rPr lang="en-US" altLang="zh-CN"/>
+              <a:t>yarn install --verbose</a:t>
+            </a:r>
+            <a:endParaRPr lang="en-US" altLang="zh-CN"/>
+          </a:p>
+          <a:p>
+            <a:pPr lvl="1"/>
+            <a:r>
+              <a:rPr lang="en-US" altLang="zh-CN"/>
+              <a:t>yarn add &lt;package&gt;</a:t>
+            </a:r>
+            <a:endParaRPr lang="en-US" altLang="zh-CN"/>
+          </a:p>
+          <a:p>
+            <a:pPr lvl="1"/>
+            <a:r>
+              <a:rPr lang="en-US" altLang="zh-CN"/>
+              <a:t>yarn remove &lt;package&gt;</a:t>
+            </a:r>
+            <a:endParaRPr lang="en-US" altLang="zh-CN"/>
+          </a:p>
+          <a:p>
+            <a:pPr lvl="1"/>
+            <a:r>
+              <a:rPr lang="en-US" altLang="zh-CN"/>
+              <a:t>yarn list</a:t>
+            </a:r>
+            <a:endParaRPr lang="en-US" altLang="zh-CN"/>
+          </a:p>
+          <a:p>
+            <a:pPr lvl="2"/>
+            <a:r>
+              <a:rPr lang="en-US" altLang="zh-CN"/>
+              <a:t>list installed packages in tree style</a:t>
+            </a:r>
+            <a:endParaRPr lang="en-US" altLang="zh-CN"/>
+          </a:p>
+          <a:p>
+            <a:pPr lvl="2"/>
+            <a:r>
+              <a:rPr lang="en-US" altLang="zh-CN"/>
+              <a:t>yarn list --pattern jszip</a:t>
+            </a:r>
+            <a:endParaRPr lang="en-US" altLang="zh-CN"/>
+          </a:p>
+          <a:p>
+            <a:pPr lvl="1"/>
+            <a:r>
+              <a:rPr lang="en-US" altLang="zh-CN"/>
+              <a:t>yarn info &lt;package-name&gt; versions --json | jq '.data'</a:t>
+            </a:r>
+            <a:endParaRPr lang="en-US" altLang="zh-CN"/>
+          </a:p>
+          <a:p>
+            <a:pPr lvl="2"/>
+            <a:r>
+              <a:rPr lang="en-US" altLang="zh-CN"/>
+              <a:t>list all available versions for a package</a:t>
+            </a:r>
+            <a:endParaRPr lang="en-US" altLang="zh-CN"/>
+          </a:p>
+          <a:p>
+            <a:pPr lvl="1"/>
+            <a:r>
+              <a:rPr lang="en-US" altLang="zh-CN"/>
+              <a:t>package cache</a:t>
+            </a:r>
+            <a:endParaRPr lang="en-US" altLang="zh-CN"/>
+          </a:p>
+          <a:p>
+            <a:pPr lvl="2"/>
+            <a:r>
+              <a:rPr lang="en-US" altLang="zh-CN"/>
+              <a:t>~/.cache/yarn/</a:t>
+            </a:r>
+            <a:endParaRPr lang="en-US" altLang="zh-CN"/>
+          </a:p>
+          <a:p>
+            <a:pPr lvl="2"/>
+            <a:r>
+              <a:rPr lang="en-US" altLang="zh-CN"/>
+              <a:t>yarn cache dir</a:t>
+            </a:r>
+            <a:endParaRPr lang="en-US" altLang="zh-CN"/>
+          </a:p>
+          <a:p>
+            <a:pPr lvl="2"/>
+            <a:r>
+              <a:rPr lang="en-US" altLang="zh-CN"/>
+              <a:t>yarn cache list</a:t>
+            </a:r>
+            <a:endParaRPr lang="en-US" altLang="zh-CN"/>
+          </a:p>
+          <a:p>
+            <a:pPr lvl="2"/>
+            <a:r>
+              <a:rPr lang="en-US" altLang="zh-CN">
+                <a:sym typeface="+mn-ea"/>
+              </a:rPr>
+              <a:t>yarn cache clean</a:t>
+            </a:r>
+            <a:endParaRPr lang="en-US" altLang="zh-CN"/>
+          </a:p>
+        </p:txBody>
+      </p:sp>
+    </p:spTree>
+    <p:custDataLst>
+      <p:tags r:id="rId1"/>
+    </p:custDataLst>
+  </p:cSld>
+  <p:clrMapOvr>
+    <a:masterClrMapping/>
+  </p:clrMapOvr>
+</p:sld>
+</file>
+
+<file path=ppt/slides/slide11.xml><?xml version="1.0" encoding="utf-8"?>
+<p:sld xmlns:a="http://schemas.openxmlformats.org/drawingml/2006/main" xmlns:r="http://schemas.openxmlformats.org/officeDocument/2006/relationships" xmlns:p="http://schemas.openxmlformats.org/presentationml/2006/main">
+  <p:cSld>
+    <p:spTree>
+      <p:nvGrpSpPr>
+        <p:cNvPr id="1" name=""/>
+        <p:cNvGrpSpPr/>
+        <p:nvPr/>
+      </p:nvGrpSpPr>
+      <p:grpSpPr/>
+      <p:sp>
+        <p:nvSpPr>
+          <p:cNvPr id="2" name="标题 1"/>
+          <p:cNvSpPr>
+            <a:spLocks noGrp="1"/>
+          </p:cNvSpPr>
+          <p:nvPr>
+            <p:ph type="title"/>
+          </p:nvPr>
+        </p:nvSpPr>
+        <p:spPr/>
+        <p:txBody>
+          <a:bodyPr/>
+          <a:p>
+            <a:r>
+              <a:rPr lang="en-US" altLang="zh-CN"/>
               <a:t>Package Management - pnpm</a:t>
             </a:r>
             <a:endParaRPr lang="en-US" altLang="zh-CN"/>
@@ -3971,7 +4212,96 @@
 </p:sld>
 </file>
 
-<file path=ppt/slides/slide11.xml><?xml version="1.0" encoding="utf-8"?>
+<file path=ppt/slides/slide12.xml><?xml version="1.0" encoding="utf-8"?>
+<p:sld xmlns:a="http://schemas.openxmlformats.org/drawingml/2006/main" xmlns:r="http://schemas.openxmlformats.org/officeDocument/2006/relationships" xmlns:p="http://schemas.openxmlformats.org/presentationml/2006/main">
+  <p:cSld>
+    <p:spTree>
+      <p:nvGrpSpPr>
+        <p:cNvPr id="1" name=""/>
+        <p:cNvGrpSpPr/>
+        <p:nvPr/>
+      </p:nvGrpSpPr>
+      <p:grpSpPr/>
+      <p:sp>
+        <p:nvSpPr>
+          <p:cNvPr id="2" name="标题 1"/>
+          <p:cNvSpPr>
+            <a:spLocks noGrp="1"/>
+          </p:cNvSpPr>
+          <p:nvPr>
+            <p:ph type="title"/>
+          </p:nvPr>
+        </p:nvSpPr>
+        <p:spPr/>
+        <p:txBody>
+          <a:bodyPr/>
+          <a:p>
+            <a:r>
+              <a:rPr lang="en-US" altLang="zh-CN"/>
+              <a:t>Node.js Project</a:t>
+            </a:r>
+            <a:endParaRPr lang="en-US" altLang="zh-CN"/>
+          </a:p>
+        </p:txBody>
+      </p:sp>
+      <p:sp>
+        <p:nvSpPr>
+          <p:cNvPr id="3" name="内容占位符 2"/>
+          <p:cNvSpPr>
+            <a:spLocks noGrp="1"/>
+          </p:cNvSpPr>
+          <p:nvPr>
+            <p:ph idx="1"/>
+          </p:nvPr>
+        </p:nvSpPr>
+        <p:spPr/>
+        <p:txBody>
+          <a:bodyPr/>
+          <a:p>
+            <a:r>
+              <a:rPr lang="en-US" altLang="zh-CN"/>
+              <a:t>Steps</a:t>
+            </a:r>
+            <a:endParaRPr lang="en-US" altLang="zh-CN"/>
+          </a:p>
+          <a:p>
+            <a:pPr lvl="1"/>
+            <a:r>
+              <a:rPr lang="en-US" altLang="zh-CN"/>
+              <a:t>npm init</a:t>
+            </a:r>
+            <a:endParaRPr lang="en-US" altLang="zh-CN"/>
+          </a:p>
+          <a:p>
+            <a:pPr lvl="1"/>
+            <a:r>
+              <a:rPr lang="en-US" altLang="zh-CN"/>
+              <a:t>modify index.js</a:t>
+            </a:r>
+            <a:endParaRPr lang="en-US" altLang="zh-CN"/>
+          </a:p>
+          <a:p>
+            <a:pPr lvl="1"/>
+            <a:r>
+              <a:rPr lang="en-US" altLang="zh-CN"/>
+              <a:t>node index.js // run</a:t>
+            </a:r>
+            <a:endParaRPr lang="en-US" altLang="zh-CN"/>
+          </a:p>
+        </p:txBody>
+      </p:sp>
+    </p:spTree>
+    <p:custDataLst>
+      <p:tags r:id="rId1"/>
+    </p:custDataLst>
+  </p:cSld>
+  <p:clrMapOvr>
+    <a:masterClrMapping/>
+  </p:clrMapOvr>
+</p:sld>
+</file>
+
+<file path=ppt/slides/slide13.xml><?xml version="1.0" encoding="utf-8"?>
 <p:sld xmlns:a="http://schemas.openxmlformats.org/drawingml/2006/main" xmlns:r="http://schemas.openxmlformats.org/officeDocument/2006/relationships" xmlns:p="http://schemas.openxmlformats.org/presentationml/2006/main">
   <p:cSld>
     <p:spTree>
@@ -4150,521 +4480,6 @@
 </p:sld>
 </file>
 
-<file path=ppt/slides/slide12.xml><?xml version="1.0" encoding="utf-8"?>
-<p:sld xmlns:a="http://schemas.openxmlformats.org/drawingml/2006/main" xmlns:r="http://schemas.openxmlformats.org/officeDocument/2006/relationships" xmlns:p="http://schemas.openxmlformats.org/presentationml/2006/main">
-  <p:cSld>
-    <p:spTree>
-      <p:nvGrpSpPr>
-        <p:cNvPr id="1" name=""/>
-        <p:cNvGrpSpPr/>
-        <p:nvPr/>
-      </p:nvGrpSpPr>
-      <p:grpSpPr/>
-      <p:sp>
-        <p:nvSpPr>
-          <p:cNvPr id="2" name="标题 1"/>
-          <p:cNvSpPr>
-            <a:spLocks noGrp="1"/>
-          </p:cNvSpPr>
-          <p:nvPr>
-            <p:ph type="title"/>
-          </p:nvPr>
-        </p:nvSpPr>
-        <p:spPr/>
-        <p:txBody>
-          <a:bodyPr/>
-          <a:p>
-            <a:r>
-              <a:rPr lang="en-US" altLang="zh-CN"/>
-              <a:t>node-opencv</a:t>
-            </a:r>
-            <a:endParaRPr lang="en-US" altLang="zh-CN"/>
-          </a:p>
-        </p:txBody>
-      </p:sp>
-      <p:sp>
-        <p:nvSpPr>
-          <p:cNvPr id="3" name="内容占位符 2"/>
-          <p:cNvSpPr>
-            <a:spLocks noGrp="1"/>
-          </p:cNvSpPr>
-          <p:nvPr>
-            <p:ph idx="1"/>
-          </p:nvPr>
-        </p:nvSpPr>
-        <p:spPr/>
-        <p:txBody>
-          <a:bodyPr/>
-          <a:p>
-            <a:r>
-              <a:rPr lang="en-US" altLang="zh-CN"/>
-              <a:t>Ref</a:t>
-            </a:r>
-            <a:endParaRPr lang="en-US" altLang="zh-CN"/>
-          </a:p>
-          <a:p>
-            <a:pPr lvl="1"/>
-            <a:r>
-              <a:rPr lang="en-US" altLang="zh-CN"/>
-              <a:t>https://github.com/peterbraden/node-opencv</a:t>
-            </a:r>
-            <a:endParaRPr lang="en-US" altLang="zh-CN"/>
-          </a:p>
-          <a:p>
-            <a:pPr lvl="1"/>
-            <a:r>
-              <a:rPr lang="en-US" altLang="zh-CN"/>
-              <a:t>https://community.risingstack.com/opencv-tutorial-computer-vision-with-node-js/</a:t>
-            </a:r>
-            <a:endParaRPr lang="en-US" altLang="zh-CN"/>
-          </a:p>
-        </p:txBody>
-      </p:sp>
-    </p:spTree>
-    <p:custDataLst>
-      <p:tags r:id="rId1"/>
-    </p:custDataLst>
-  </p:cSld>
-  <p:clrMapOvr>
-    <a:masterClrMapping/>
-  </p:clrMapOvr>
-</p:sld>
-</file>
-
-<file path=ppt/slides/slide13.xml><?xml version="1.0" encoding="utf-8"?>
-<p:sld xmlns:a="http://schemas.openxmlformats.org/drawingml/2006/main" xmlns:r="http://schemas.openxmlformats.org/officeDocument/2006/relationships" xmlns:p="http://schemas.openxmlformats.org/presentationml/2006/main">
-  <p:cSld>
-    <p:spTree>
-      <p:nvGrpSpPr>
-        <p:cNvPr id="1" name=""/>
-        <p:cNvGrpSpPr/>
-        <p:nvPr/>
-      </p:nvGrpSpPr>
-      <p:grpSpPr/>
-      <p:sp>
-        <p:nvSpPr>
-          <p:cNvPr id="2" name="标题 1"/>
-          <p:cNvSpPr>
-            <a:spLocks noGrp="1"/>
-          </p:cNvSpPr>
-          <p:nvPr>
-            <p:ph type="title"/>
-          </p:nvPr>
-        </p:nvSpPr>
-        <p:spPr/>
-        <p:txBody>
-          <a:bodyPr/>
-          <a:p>
-            <a:r>
-              <a:rPr lang="en-US" altLang="zh-CN"/>
-              <a:t>Set Up Web Server</a:t>
-            </a:r>
-            <a:endParaRPr lang="en-US" altLang="zh-CN"/>
-          </a:p>
-        </p:txBody>
-      </p:sp>
-      <p:sp>
-        <p:nvSpPr>
-          <p:cNvPr id="3" name="内容占位符 2"/>
-          <p:cNvSpPr>
-            <a:spLocks noGrp="1"/>
-          </p:cNvSpPr>
-          <p:nvPr>
-            <p:ph idx="1"/>
-          </p:nvPr>
-        </p:nvSpPr>
-        <p:spPr>
-          <a:xfrm>
-            <a:off x="838200" y="1211580"/>
-            <a:ext cx="5915025" cy="4549140"/>
-          </a:xfrm>
-        </p:spPr>
-        <p:txBody>
-          <a:bodyPr>
-            <a:normAutofit lnSpcReduction="20000"/>
-          </a:bodyPr>
-          <a:p>
-            <a:r>
-              <a:rPr lang="en-US" altLang="zh-CN"/>
-              <a:t>References</a:t>
-            </a:r>
-            <a:endParaRPr lang="en-US" altLang="zh-CN"/>
-          </a:p>
-          <a:p>
-            <a:pPr lvl="1"/>
-            <a:r>
-              <a:rPr lang="en-US" altLang="zh-CN"/>
-              <a:t>https://nodejs.org/en/docs/guides/nodejs-docker-webapp/</a:t>
-            </a:r>
-            <a:endParaRPr lang="en-US" altLang="zh-CN"/>
-          </a:p>
-          <a:p>
-            <a:r>
-              <a:rPr lang="en-US" altLang="zh-CN"/>
-              <a:t>Steps</a:t>
-            </a:r>
-            <a:endParaRPr lang="en-US" altLang="zh-CN"/>
-          </a:p>
-          <a:p>
-            <a:pPr lvl="1"/>
-            <a:r>
-              <a:rPr lang="en-US" altLang="zh-CN"/>
-              <a:t>mkdir proj &amp; cd proj</a:t>
-            </a:r>
-            <a:endParaRPr lang="en-US" altLang="zh-CN"/>
-          </a:p>
-          <a:p>
-            <a:pPr lvl="1"/>
-            <a:r>
-              <a:rPr lang="en-US" altLang="zh-CN"/>
-              <a:t>cnpm init</a:t>
-            </a:r>
-            <a:endParaRPr lang="en-US" altLang="zh-CN"/>
-          </a:p>
-          <a:p>
-            <a:pPr lvl="1"/>
-            <a:r>
-              <a:rPr lang="en-US" altLang="zh-CN"/>
-              <a:t>create app.js</a:t>
-            </a:r>
-            <a:endParaRPr lang="en-US" altLang="zh-CN"/>
-          </a:p>
-          <a:p>
-            <a:pPr lvl="1"/>
-            <a:r>
-              <a:rPr lang="en-US" altLang="zh-CN"/>
-              <a:t>create package.json</a:t>
-            </a:r>
-            <a:endParaRPr lang="en-US" altLang="zh-CN"/>
-          </a:p>
-          <a:p>
-            <a:pPr lvl="1"/>
-            <a:r>
-              <a:rPr lang="en-US" altLang="zh-CN"/>
-              <a:t>run “node app.js”</a:t>
-            </a:r>
-            <a:endParaRPr lang="en-US" altLang="zh-CN"/>
-          </a:p>
-          <a:p>
-            <a:pPr lvl="0"/>
-            <a:endParaRPr lang="en-US" altLang="zh-CN"/>
-          </a:p>
-        </p:txBody>
-      </p:sp>
-      <p:sp>
-        <p:nvSpPr>
-          <p:cNvPr id="4" name="文本框 3"/>
-          <p:cNvSpPr txBox="1"/>
-          <p:nvPr/>
-        </p:nvSpPr>
-        <p:spPr>
-          <a:xfrm>
-            <a:off x="6980555" y="406400"/>
-            <a:ext cx="4267200" cy="3630930"/>
-          </a:xfrm>
-          <a:prstGeom prst="rect">
-            <a:avLst/>
-          </a:prstGeom>
-          <a:noFill/>
-          <a:ln>
-            <a:solidFill>
-              <a:srgbClr val="C00000"/>
-            </a:solidFill>
-          </a:ln>
-        </p:spPr>
-        <p:txBody>
-          <a:bodyPr wrap="square" rtlCol="0" anchor="t">
-            <a:spAutoFit/>
-          </a:bodyPr>
-          <a:p>
-            <a:r>
-              <a:rPr lang="en-US" altLang="zh-CN" sz="1000" b="1"/>
-              <a:t>server.js</a:t>
-            </a:r>
-            <a:endParaRPr lang="en-US" altLang="zh-CN" sz="1000" b="1"/>
-          </a:p>
-          <a:p>
-            <a:endParaRPr lang="en-US" altLang="zh-CN" sz="1000"/>
-          </a:p>
-          <a:p>
-            <a:r>
-              <a:rPr lang="zh-CN" altLang="en-US" sz="1000"/>
-              <a:t>const express = require("express");</a:t>
-            </a:r>
-            <a:endParaRPr lang="zh-CN" altLang="en-US" sz="1000"/>
-          </a:p>
-          <a:p>
-            <a:r>
-              <a:rPr lang="zh-CN" altLang="en-US" sz="1000"/>
-              <a:t>const bodyParser = require("body-parser")</a:t>
-            </a:r>
-            <a:endParaRPr lang="zh-CN" altLang="en-US" sz="1000"/>
-          </a:p>
-          <a:p>
-            <a:endParaRPr lang="zh-CN" altLang="en-US" sz="1000"/>
-          </a:p>
-          <a:p>
-            <a:r>
-              <a:rPr lang="zh-CN" altLang="en-US" sz="1000"/>
-              <a:t>// New app using express module</a:t>
-            </a:r>
-            <a:endParaRPr lang="zh-CN" altLang="en-US" sz="1000"/>
-          </a:p>
-          <a:p>
-            <a:r>
-              <a:rPr lang="zh-CN" altLang="en-US" sz="1000"/>
-              <a:t>const app = express();</a:t>
-            </a:r>
-            <a:endParaRPr lang="zh-CN" altLang="en-US" sz="1000"/>
-          </a:p>
-          <a:p>
-            <a:r>
-              <a:rPr lang="zh-CN" altLang="en-US" sz="1000"/>
-              <a:t>app.use(bodyParser.urlencoded({</a:t>
-            </a:r>
-            <a:endParaRPr lang="zh-CN" altLang="en-US" sz="1000"/>
-          </a:p>
-          <a:p>
-            <a:r>
-              <a:rPr lang="zh-CN" altLang="en-US" sz="1000"/>
-              <a:t>  extended:true</a:t>
-            </a:r>
-            <a:endParaRPr lang="zh-CN" altLang="en-US" sz="1000"/>
-          </a:p>
-          <a:p>
-            <a:r>
-              <a:rPr lang="zh-CN" altLang="en-US" sz="1000"/>
-              <a:t>}));</a:t>
-            </a:r>
-            <a:endParaRPr lang="zh-CN" altLang="en-US" sz="1000"/>
-          </a:p>
-          <a:p>
-            <a:endParaRPr lang="zh-CN" altLang="en-US" sz="1000"/>
-          </a:p>
-          <a:p>
-            <a:r>
-              <a:rPr lang="zh-CN" altLang="en-US" sz="1000"/>
-              <a:t>app.get("/", function(req, res) {</a:t>
-            </a:r>
-            <a:endParaRPr lang="zh-CN" altLang="en-US" sz="1000"/>
-          </a:p>
-          <a:p>
-            <a:r>
-              <a:rPr lang="zh-CN" altLang="en-US" sz="1000"/>
-              <a:t>  console.log('Received get request')</a:t>
-            </a:r>
-            <a:endParaRPr lang="zh-CN" altLang="en-US" sz="1000"/>
-          </a:p>
-          <a:p>
-            <a:r>
-              <a:rPr lang="zh-CN" altLang="en-US" sz="1000"/>
-              <a:t>  res.send('Received get request')</a:t>
-            </a:r>
-            <a:endParaRPr lang="zh-CN" altLang="en-US" sz="1000"/>
-          </a:p>
-          <a:p>
-            <a:r>
-              <a:rPr lang="zh-CN" altLang="en-US" sz="1000"/>
-              <a:t>});</a:t>
-            </a:r>
-            <a:endParaRPr lang="zh-CN" altLang="en-US" sz="1000"/>
-          </a:p>
-          <a:p>
-            <a:endParaRPr lang="zh-CN" altLang="en-US" sz="1000"/>
-          </a:p>
-          <a:p>
-            <a:r>
-              <a:rPr lang="zh-CN" altLang="en-US" sz="1000"/>
-              <a:t>app.post("/qrcode", function(req, res) {</a:t>
-            </a:r>
-            <a:endParaRPr lang="zh-CN" altLang="en-US" sz="1000"/>
-          </a:p>
-          <a:p>
-            <a:r>
-              <a:rPr lang="zh-CN" altLang="en-US" sz="1000"/>
-              <a:t>  res.send("Received post request, body=", req.body);</a:t>
-            </a:r>
-            <a:endParaRPr lang="zh-CN" altLang="en-US" sz="1000"/>
-          </a:p>
-          <a:p>
-            <a:r>
-              <a:rPr lang="zh-CN" altLang="en-US" sz="1000"/>
-              <a:t>});</a:t>
-            </a:r>
-            <a:endParaRPr lang="zh-CN" altLang="en-US" sz="1000"/>
-          </a:p>
-          <a:p>
-            <a:endParaRPr lang="zh-CN" altLang="en-US" sz="1000"/>
-          </a:p>
-          <a:p>
-            <a:r>
-              <a:rPr lang="zh-CN" altLang="en-US" sz="1000"/>
-              <a:t>app.listen(8080, function(){</a:t>
-            </a:r>
-            <a:endParaRPr lang="zh-CN" altLang="en-US" sz="1000"/>
-          </a:p>
-          <a:p>
-            <a:r>
-              <a:rPr lang="zh-CN" altLang="en-US" sz="1000"/>
-              <a:t>  console.log("server is running on port 8080");</a:t>
-            </a:r>
-            <a:endParaRPr lang="zh-CN" altLang="en-US" sz="1000"/>
-          </a:p>
-          <a:p>
-            <a:r>
-              <a:rPr lang="zh-CN" altLang="en-US" sz="1000"/>
-              <a:t>})</a:t>
-            </a:r>
-            <a:endParaRPr lang="zh-CN" altLang="en-US" sz="1000"/>
-          </a:p>
-        </p:txBody>
-      </p:sp>
-      <p:sp>
-        <p:nvSpPr>
-          <p:cNvPr id="6" name="文本框 5"/>
-          <p:cNvSpPr txBox="1"/>
-          <p:nvPr/>
-        </p:nvSpPr>
-        <p:spPr>
-          <a:xfrm>
-            <a:off x="6980555" y="4037330"/>
-            <a:ext cx="4266565" cy="2553335"/>
-          </a:xfrm>
-          <a:prstGeom prst="rect">
-            <a:avLst/>
-          </a:prstGeom>
-          <a:noFill/>
-          <a:ln>
-            <a:solidFill>
-              <a:srgbClr val="C00000"/>
-            </a:solidFill>
-          </a:ln>
-        </p:spPr>
-        <p:txBody>
-          <a:bodyPr wrap="square" rtlCol="0" anchor="t">
-            <a:spAutoFit/>
-          </a:bodyPr>
-          <a:p>
-            <a:r>
-              <a:rPr lang="en-US" altLang="zh-CN" sz="1000" b="1"/>
-              <a:t>package.json</a:t>
-            </a:r>
-            <a:endParaRPr lang="en-US" altLang="zh-CN" sz="1000" b="1"/>
-          </a:p>
-          <a:p>
-            <a:endParaRPr lang="en-US" altLang="zh-CN" sz="1000"/>
-          </a:p>
-          <a:p>
-            <a:r>
-              <a:rPr lang="zh-CN" altLang="en-US" sz="1000"/>
-              <a:t>{</a:t>
-            </a:r>
-            <a:endParaRPr lang="zh-CN" altLang="en-US" sz="1000"/>
-          </a:p>
-          <a:p>
-            <a:r>
-              <a:rPr lang="zh-CN" altLang="en-US" sz="1000"/>
-              <a:t>  "name": "docker_web_app",</a:t>
-            </a:r>
-            <a:endParaRPr lang="zh-CN" altLang="en-US" sz="1000"/>
-          </a:p>
-          <a:p>
-            <a:r>
-              <a:rPr lang="zh-CN" altLang="en-US" sz="1000"/>
-              <a:t>  "version": "1.0.0",</a:t>
-            </a:r>
-            <a:endParaRPr lang="zh-CN" altLang="en-US" sz="1000"/>
-          </a:p>
-          <a:p>
-            <a:r>
-              <a:rPr lang="zh-CN" altLang="en-US" sz="1000"/>
-              <a:t>  "description": "Node.js on Docker",</a:t>
-            </a:r>
-            <a:endParaRPr lang="zh-CN" altLang="en-US" sz="1000"/>
-          </a:p>
-          <a:p>
-            <a:r>
-              <a:rPr lang="zh-CN" altLang="en-US" sz="1000"/>
-              <a:t>  "author": "First Last &lt;first.last@example.com&gt;",</a:t>
-            </a:r>
-            <a:endParaRPr lang="zh-CN" altLang="en-US" sz="1000"/>
-          </a:p>
-          <a:p>
-            <a:r>
-              <a:rPr lang="zh-CN" altLang="en-US" sz="1000"/>
-              <a:t>  "main": "server.js",</a:t>
-            </a:r>
-            <a:endParaRPr lang="zh-CN" altLang="en-US" sz="1000"/>
-          </a:p>
-          <a:p>
-            <a:r>
-              <a:rPr lang="zh-CN" altLang="en-US" sz="1000"/>
-              <a:t>  "scripts": {</a:t>
-            </a:r>
-            <a:endParaRPr lang="zh-CN" altLang="en-US" sz="1000"/>
-          </a:p>
-          <a:p>
-            <a:r>
-              <a:rPr lang="zh-CN" altLang="en-US" sz="1000"/>
-              <a:t>    "start": "node server.js"</a:t>
-            </a:r>
-            <a:endParaRPr lang="zh-CN" altLang="en-US" sz="1000"/>
-          </a:p>
-          <a:p>
-            <a:r>
-              <a:rPr lang="zh-CN" altLang="en-US" sz="1000"/>
-              <a:t>  },</a:t>
-            </a:r>
-            <a:endParaRPr lang="zh-CN" altLang="en-US" sz="1000"/>
-          </a:p>
-          <a:p>
-            <a:r>
-              <a:rPr lang="zh-CN" altLang="en-US" sz="1000"/>
-              <a:t>  "dependencies": {</a:t>
-            </a:r>
-            <a:endParaRPr lang="zh-CN" altLang="en-US" sz="1000"/>
-          </a:p>
-          <a:p>
-            <a:r>
-              <a:rPr lang="zh-CN" altLang="en-US" sz="1000"/>
-              <a:t>    "express": "^4.16.1",</a:t>
-            </a:r>
-            <a:endParaRPr lang="zh-CN" altLang="en-US" sz="1000"/>
-          </a:p>
-          <a:p>
-            <a:r>
-              <a:rPr lang="zh-CN" altLang="en-US" sz="1000"/>
-              <a:t>    "body-parser": "^1.19.1"</a:t>
-            </a:r>
-            <a:endParaRPr lang="zh-CN" altLang="en-US" sz="1000"/>
-          </a:p>
-          <a:p>
-            <a:r>
-              <a:rPr lang="zh-CN" altLang="en-US" sz="1000"/>
-              <a:t>  }</a:t>
-            </a:r>
-            <a:endParaRPr lang="zh-CN" altLang="en-US" sz="1000"/>
-          </a:p>
-          <a:p>
-            <a:r>
-              <a:rPr lang="zh-CN" altLang="en-US" sz="1000"/>
-              <a:t>}</a:t>
-            </a:r>
-            <a:endParaRPr lang="zh-CN" altLang="en-US" sz="1000"/>
-          </a:p>
-        </p:txBody>
-      </p:sp>
-    </p:spTree>
-    <p:custDataLst>
-      <p:tags r:id="rId1"/>
-    </p:custDataLst>
-  </p:cSld>
-  <p:clrMapOvr>
-    <a:masterClrMapping/>
-  </p:clrMapOvr>
-</p:sld>
-</file>
-
 <file path=ppt/slides/slide14.xml><?xml version="1.0" encoding="utf-8"?>
 <p:sld xmlns:a="http://schemas.openxmlformats.org/drawingml/2006/main" xmlns:r="http://schemas.openxmlformats.org/officeDocument/2006/relationships" xmlns:p="http://schemas.openxmlformats.org/presentationml/2006/main">
   <p:cSld>
@@ -4691,7 +4506,7 @@
           <a:p>
             <a:r>
               <a:rPr lang="en-US" altLang="zh-CN"/>
-              <a:t>Web Server using Docker</a:t>
+              <a:t>node-opencv</a:t>
             </a:r>
             <a:endParaRPr lang="en-US" altLang="zh-CN"/>
           </a:p>
@@ -4707,266 +4522,31 @@
             <p:ph idx="1"/>
           </p:nvPr>
         </p:nvSpPr>
-        <p:spPr>
-          <a:xfrm>
-            <a:off x="838200" y="1211580"/>
-            <a:ext cx="6300470" cy="4549140"/>
-          </a:xfrm>
-        </p:spPr>
+        <p:spPr/>
         <p:txBody>
           <a:bodyPr/>
           <a:p>
-            <a:pPr lvl="0"/>
-            <a:r>
-              <a:rPr lang="en-US" altLang="zh-CN" sz="2400">
-                <a:sym typeface="+mn-ea"/>
-              </a:rPr>
-              <a:t>Docker</a:t>
-            </a:r>
-            <a:endParaRPr lang="en-US" altLang="zh-CN" sz="2400"/>
-          </a:p>
-          <a:p>
-            <a:pPr lvl="1"/>
-            <a:r>
-              <a:rPr lang="en-US" altLang="zh-CN" sz="2400">
-                <a:sym typeface="+mn-ea"/>
-              </a:rPr>
-              <a:t>create Dockerfile</a:t>
-            </a:r>
-            <a:endParaRPr lang="en-US" altLang="zh-CN" sz="2400"/>
-          </a:p>
-          <a:p>
-            <a:pPr lvl="1"/>
-            <a:r>
-              <a:rPr lang="en-US" altLang="zh-CN" sz="2400">
-                <a:sym typeface="+mn-ea"/>
-              </a:rPr>
-              <a:t>create server.js</a:t>
-            </a:r>
-            <a:endParaRPr lang="en-US" altLang="zh-CN" sz="2400"/>
-          </a:p>
-          <a:p>
-            <a:pPr lvl="1"/>
-            <a:r>
-              <a:rPr lang="en-US" altLang="zh-CN" sz="2400">
-                <a:sym typeface="+mn-ea"/>
-              </a:rPr>
-              <a:t>run “docker build . -t node-web-app”</a:t>
-            </a:r>
-            <a:endParaRPr lang="en-US" altLang="zh-CN" sz="2400">
-              <a:sym typeface="+mn-ea"/>
-            </a:endParaRPr>
-          </a:p>
-          <a:p>
-            <a:pPr lvl="1"/>
-            <a:r>
-              <a:rPr lang="en-US" altLang="zh-CN" sz="2400">
-                <a:sym typeface="+mn-ea"/>
-              </a:rPr>
-              <a:t>run “docker run -p 8080:8080 -d node-web-app”</a:t>
-            </a:r>
-            <a:endParaRPr lang="zh-CN" altLang="en-US"/>
-          </a:p>
-        </p:txBody>
-      </p:sp>
-      <p:sp>
-        <p:nvSpPr>
-          <p:cNvPr id="5" name="文本框 4"/>
-          <p:cNvSpPr txBox="1"/>
-          <p:nvPr/>
-        </p:nvSpPr>
-        <p:spPr>
-          <a:xfrm>
-            <a:off x="7287895" y="1317625"/>
-            <a:ext cx="4267200" cy="3476625"/>
-          </a:xfrm>
-          <a:prstGeom prst="rect">
-            <a:avLst/>
-          </a:prstGeom>
-          <a:noFill/>
-          <a:ln>
-            <a:solidFill>
-              <a:srgbClr val="C00000"/>
-            </a:solidFill>
-          </a:ln>
-        </p:spPr>
-        <p:txBody>
-          <a:bodyPr wrap="square" rtlCol="0" anchor="t">
-            <a:spAutoFit/>
-          </a:bodyPr>
-          <a:p>
-            <a:r>
-              <a:rPr lang="en-US" altLang="zh-CN" sz="1000" b="1"/>
-              <a:t>Dockerfile</a:t>
-            </a:r>
-            <a:endParaRPr lang="en-US" altLang="zh-CN" sz="1000" b="1"/>
-          </a:p>
-          <a:p>
-            <a:endParaRPr lang="en-US" altLang="zh-CN" sz="1000"/>
-          </a:p>
-          <a:p>
-            <a:r>
-              <a:rPr lang="en-US" altLang="zh-CN" sz="1000"/>
-              <a:t>FROM node:16</a:t>
-            </a:r>
-            <a:endParaRPr lang="en-US" altLang="zh-CN" sz="1000"/>
-          </a:p>
-          <a:p>
-            <a:endParaRPr lang="en-US" altLang="zh-CN" sz="1000"/>
-          </a:p>
-          <a:p>
-            <a:r>
-              <a:rPr lang="en-US" altLang="zh-CN" sz="1000"/>
-              <a:t># Create app directory</a:t>
-            </a:r>
-            <a:endParaRPr lang="en-US" altLang="zh-CN" sz="1000"/>
-          </a:p>
-          <a:p>
-            <a:r>
-              <a:rPr lang="en-US" altLang="zh-CN" sz="1000"/>
-              <a:t>WORKDIR /usr/src/app</a:t>
-            </a:r>
-            <a:endParaRPr lang="en-US" altLang="zh-CN" sz="1000"/>
-          </a:p>
-          <a:p>
-            <a:endParaRPr lang="en-US" altLang="zh-CN" sz="1000"/>
-          </a:p>
-          <a:p>
-            <a:r>
-              <a:rPr lang="en-US" altLang="zh-CN" sz="1000"/>
-              <a:t># Install app dependencies</a:t>
-            </a:r>
-            <a:endParaRPr lang="en-US" altLang="zh-CN" sz="1000"/>
-          </a:p>
-          <a:p>
-            <a:r>
-              <a:rPr lang="en-US" altLang="zh-CN" sz="1000"/>
-              <a:t># A wildcard is used to ensure both package.json AND package-lock.json are copied</a:t>
-            </a:r>
-            <a:endParaRPr lang="en-US" altLang="zh-CN" sz="1000"/>
-          </a:p>
-          <a:p>
-            <a:r>
-              <a:rPr lang="en-US" altLang="zh-CN" sz="1000"/>
-              <a:t># where available (npm@5+)</a:t>
-            </a:r>
-            <a:endParaRPr lang="en-US" altLang="zh-CN" sz="1000"/>
-          </a:p>
-          <a:p>
-            <a:r>
-              <a:rPr lang="en-US" altLang="zh-CN" sz="1000"/>
-              <a:t>COPY package*.json ./</a:t>
-            </a:r>
-            <a:endParaRPr lang="en-US" altLang="zh-CN" sz="1000"/>
-          </a:p>
-          <a:p>
-            <a:endParaRPr lang="en-US" altLang="zh-CN" sz="1000"/>
-          </a:p>
-          <a:p>
-            <a:r>
-              <a:rPr lang="en-US" altLang="zh-CN" sz="1000"/>
-              <a:t>RUN npm install</a:t>
-            </a:r>
-            <a:endParaRPr lang="en-US" altLang="zh-CN" sz="1000"/>
-          </a:p>
-          <a:p>
-            <a:r>
-              <a:rPr lang="en-US" altLang="zh-CN" sz="1000"/>
-              <a:t># If you are building your code for production</a:t>
-            </a:r>
-            <a:endParaRPr lang="en-US" altLang="zh-CN" sz="1000"/>
-          </a:p>
-          <a:p>
-            <a:r>
-              <a:rPr lang="en-US" altLang="zh-CN" sz="1000"/>
-              <a:t># RUN npm ci --only=production</a:t>
-            </a:r>
-            <a:endParaRPr lang="en-US" altLang="zh-CN" sz="1000"/>
-          </a:p>
-          <a:p>
-            <a:endParaRPr lang="en-US" altLang="zh-CN" sz="1000"/>
-          </a:p>
-          <a:p>
-            <a:r>
-              <a:rPr lang="en-US" altLang="zh-CN" sz="1000"/>
-              <a:t># Bundle app source</a:t>
-            </a:r>
-            <a:endParaRPr lang="en-US" altLang="zh-CN" sz="1000"/>
-          </a:p>
-          <a:p>
-            <a:r>
-              <a:rPr lang="en-US" altLang="zh-CN" sz="1000"/>
-              <a:t>COPY . .</a:t>
-            </a:r>
-            <a:endParaRPr lang="en-US" altLang="zh-CN" sz="1000"/>
-          </a:p>
-          <a:p>
-            <a:endParaRPr lang="en-US" altLang="zh-CN" sz="1000"/>
-          </a:p>
-          <a:p>
-            <a:r>
-              <a:rPr lang="en-US" altLang="zh-CN" sz="1000"/>
-              <a:t>EXPOSE 8080</a:t>
-            </a:r>
-            <a:endParaRPr lang="en-US" altLang="zh-CN" sz="1000"/>
-          </a:p>
-          <a:p>
-            <a:r>
-              <a:rPr lang="en-US" altLang="zh-CN" sz="1000"/>
-              <a:t>CMD [ "node", "server.js" ]</a:t>
-            </a:r>
-            <a:endParaRPr lang="en-US" altLang="zh-CN" sz="1000"/>
-          </a:p>
-        </p:txBody>
-      </p:sp>
-      <p:sp>
-        <p:nvSpPr>
-          <p:cNvPr id="4" name="文本框 3"/>
-          <p:cNvSpPr txBox="1"/>
-          <p:nvPr/>
-        </p:nvSpPr>
-        <p:spPr>
-          <a:xfrm>
-            <a:off x="7287895" y="5197475"/>
-            <a:ext cx="2540000" cy="706755"/>
-          </a:xfrm>
-          <a:prstGeom prst="rect">
-            <a:avLst/>
-          </a:prstGeom>
-          <a:noFill/>
-          <a:ln>
-            <a:solidFill>
-              <a:srgbClr val="C00000"/>
-            </a:solidFill>
-          </a:ln>
-        </p:spPr>
-        <p:txBody>
-          <a:bodyPr wrap="square" rtlCol="0" anchor="t">
-            <a:spAutoFit/>
-          </a:bodyPr>
-          <a:p>
-            <a:r>
-              <a:rPr lang="en-US" altLang="zh-CN" sz="1000" b="1"/>
-              <a:t>.dockerignore</a:t>
-            </a:r>
-            <a:endParaRPr lang="en-US" altLang="zh-CN" sz="1000" b="1"/>
-          </a:p>
-          <a:p>
-            <a:endParaRPr lang="en-US" altLang="zh-CN" sz="1000"/>
-          </a:p>
-          <a:p>
-            <a:r>
-              <a:rPr lang="zh-CN" altLang="en-US" sz="1000"/>
-              <a:t>node_modules</a:t>
-            </a:r>
-            <a:endParaRPr lang="zh-CN" altLang="en-US" sz="1000"/>
-          </a:p>
-          <a:p>
-            <a:r>
-              <a:rPr lang="zh-CN" altLang="en-US" sz="1000"/>
-              <a:t>npm-debug.log</a:t>
-            </a:r>
-            <a:endParaRPr lang="zh-CN" altLang="en-US" sz="1000"/>
+            <a:r>
+              <a:rPr lang="en-US" altLang="zh-CN"/>
+              <a:t>Ref</a:t>
+            </a:r>
+            <a:endParaRPr lang="en-US" altLang="zh-CN"/>
+          </a:p>
+          <a:p>
+            <a:pPr lvl="1"/>
+            <a:r>
+              <a:rPr lang="en-US" altLang="zh-CN"/>
+              <a:t>https://github.com/peterbraden/node-opencv</a:t>
+            </a:r>
+            <a:endParaRPr lang="en-US" altLang="zh-CN"/>
+          </a:p>
+          <a:p>
+            <a:pPr lvl="1"/>
+            <a:r>
+              <a:rPr lang="en-US" altLang="zh-CN"/>
+              <a:t>https://community.risingstack.com/opencv-tutorial-computer-vision-with-node-js/</a:t>
+            </a:r>
+            <a:endParaRPr lang="en-US" altLang="zh-CN"/>
           </a:p>
         </p:txBody>
       </p:sp>
@@ -5007,7 +4587,7 @@
           <a:p>
             <a:r>
               <a:rPr lang="en-US" altLang="zh-CN"/>
-              <a:t>Express</a:t>
+              <a:t>Set Up Web Server</a:t>
             </a:r>
             <a:endParaRPr lang="en-US" altLang="zh-CN"/>
           </a:p>
@@ -5026,16 +4606,77 @@
         <p:spPr>
           <a:xfrm>
             <a:off x="838200" y="1211580"/>
-            <a:ext cx="5095240" cy="4549140"/>
+            <a:ext cx="5915025" cy="4549140"/>
           </a:xfrm>
         </p:spPr>
         <p:txBody>
-          <a:bodyPr/>
+          <a:bodyPr>
+            <a:normAutofit lnSpcReduction="20000"/>
+          </a:bodyPr>
+          <a:p>
+            <a:r>
+              <a:rPr lang="en-US" altLang="zh-CN"/>
+              <a:t>References</a:t>
+            </a:r>
+            <a:endParaRPr lang="en-US" altLang="zh-CN"/>
+          </a:p>
+          <a:p>
+            <a:pPr lvl="1"/>
+            <a:r>
+              <a:rPr lang="en-US" altLang="zh-CN"/>
+              <a:t>https://nodejs.org/en/docs/guides/nodejs-docker-webapp/</a:t>
+            </a:r>
+            <a:endParaRPr lang="en-US" altLang="zh-CN"/>
+          </a:p>
           <a:p>
             <a:r>
               <a:rPr lang="en-US" altLang="zh-CN"/>
               <a:t>Steps</a:t>
             </a:r>
+            <a:endParaRPr lang="en-US" altLang="zh-CN"/>
+          </a:p>
+          <a:p>
+            <a:pPr lvl="1"/>
+            <a:r>
+              <a:rPr lang="en-US" altLang="zh-CN"/>
+              <a:t>mkdir proj &amp; cd proj</a:t>
+            </a:r>
+            <a:endParaRPr lang="en-US" altLang="zh-CN"/>
+          </a:p>
+          <a:p>
+            <a:pPr lvl="1"/>
+            <a:r>
+              <a:rPr lang="en-US" altLang="zh-CN"/>
+              <a:t>cnpm init</a:t>
+            </a:r>
+            <a:endParaRPr lang="en-US" altLang="zh-CN"/>
+          </a:p>
+          <a:p>
+            <a:pPr lvl="1"/>
+            <a:r>
+              <a:rPr lang="en-US" altLang="zh-CN"/>
+              <a:t>create app.js</a:t>
+            </a:r>
+            <a:endParaRPr lang="en-US" altLang="zh-CN"/>
+          </a:p>
+          <a:p>
+            <a:pPr lvl="1"/>
+            <a:r>
+              <a:rPr lang="en-US" altLang="zh-CN"/>
+              <a:t>create package.json</a:t>
+            </a:r>
+            <a:endParaRPr lang="en-US" altLang="zh-CN"/>
+          </a:p>
+          <a:p>
+            <a:pPr lvl="1"/>
+            <a:r>
+              <a:rPr lang="en-US" altLang="zh-CN"/>
+              <a:t>run “node app.js”</a:t>
+            </a:r>
+            <a:endParaRPr lang="en-US" altLang="zh-CN"/>
+          </a:p>
+          <a:p>
+            <a:pPr lvl="0"/>
             <a:endParaRPr lang="en-US" altLang="zh-CN"/>
           </a:p>
         </p:txBody>
@@ -5048,8 +4689,8 @@
         </p:nvSpPr>
         <p:spPr>
           <a:xfrm>
-            <a:off x="7767955" y="1167130"/>
-            <a:ext cx="3677285" cy="4523105"/>
+            <a:off x="6980555" y="406400"/>
+            <a:ext cx="4267200" cy="3630930"/>
           </a:xfrm>
           <a:prstGeom prst="rect">
             <a:avLst/>
@@ -5067,151 +4708,279 @@
           </a:bodyPr>
           <a:p>
             <a:r>
-              <a:rPr lang="zh-CN" altLang="en-US" sz="1200"/>
-              <a:t>/* express的服务器 */</a:t>
-            </a:r>
-            <a:endParaRPr lang="zh-CN" altLang="en-US" sz="1200"/>
-          </a:p>
-          <a:p>
-            <a:endParaRPr lang="zh-CN" altLang="en-US" sz="1200"/>
-          </a:p>
-          <a:p>
-            <a:r>
-              <a:rPr lang="zh-CN" altLang="en-US" sz="1200"/>
-              <a:t>//1. 导入express</a:t>
-            </a:r>
-            <a:endParaRPr lang="zh-CN" altLang="en-US" sz="1200"/>
-          </a:p>
-          <a:p>
-            <a:r>
-              <a:rPr lang="zh-CN" altLang="en-US" sz="1200"/>
-              <a:t>var express = require('express')</a:t>
-            </a:r>
-            <a:endParaRPr lang="zh-CN" altLang="en-US" sz="1200"/>
-          </a:p>
-          <a:p>
-            <a:endParaRPr lang="zh-CN" altLang="en-US" sz="1200"/>
-          </a:p>
-          <a:p>
-            <a:r>
-              <a:rPr lang="zh-CN" altLang="en-US" sz="1200"/>
-              <a:t>//2. 创建express服务器</a:t>
-            </a:r>
-            <a:endParaRPr lang="zh-CN" altLang="en-US" sz="1200"/>
-          </a:p>
-          <a:p>
-            <a:r>
-              <a:rPr lang="zh-CN" altLang="en-US" sz="1200"/>
-              <a:t>var server = express()</a:t>
-            </a:r>
-            <a:endParaRPr lang="zh-CN" altLang="en-US" sz="1200"/>
-          </a:p>
-          <a:p>
-            <a:endParaRPr lang="zh-CN" altLang="en-US" sz="1200"/>
-          </a:p>
-          <a:p>
-            <a:r>
-              <a:rPr lang="zh-CN" altLang="en-US" sz="1200"/>
-              <a:t>//3. 访问服务器(get或者post)</a:t>
-            </a:r>
-            <a:endParaRPr lang="zh-CN" altLang="en-US" sz="1200"/>
-          </a:p>
-          <a:p>
-            <a:r>
-              <a:rPr lang="zh-CN" altLang="en-US" sz="1200"/>
-              <a:t>//参数一: 请求根路径</a:t>
-            </a:r>
-            <a:endParaRPr lang="zh-CN" altLang="en-US" sz="1200"/>
-          </a:p>
-          <a:p>
-            <a:r>
-              <a:rPr lang="zh-CN" altLang="en-US" sz="1200"/>
-              <a:t>//3.1 get请求</a:t>
-            </a:r>
-            <a:endParaRPr lang="zh-CN" altLang="en-US" sz="1200"/>
-          </a:p>
-          <a:p>
-            <a:r>
-              <a:rPr lang="zh-CN" altLang="en-US" sz="1200"/>
-              <a:t>server.get('/', function (request, response) {</a:t>
-            </a:r>
-            <a:endParaRPr lang="zh-CN" altLang="en-US" sz="1200"/>
-          </a:p>
-          <a:p>
-            <a:r>
-              <a:rPr lang="zh-CN" altLang="en-US" sz="1200"/>
-              <a:t>    // console.log(request)</a:t>
-            </a:r>
-            <a:endParaRPr lang="zh-CN" altLang="en-US" sz="1200"/>
-          </a:p>
-          <a:p>
-            <a:r>
-              <a:rPr lang="zh-CN" altLang="en-US" sz="1200"/>
-              <a:t>    response.send('get请求成功')</a:t>
-            </a:r>
-            <a:endParaRPr lang="zh-CN" altLang="en-US" sz="1200"/>
-          </a:p>
-          <a:p>
-            <a:r>
-              <a:rPr lang="zh-CN" altLang="en-US" sz="1200"/>
+              <a:rPr lang="en-US" altLang="zh-CN" sz="1000" b="1"/>
+              <a:t>server.js</a:t>
+            </a:r>
+            <a:endParaRPr lang="en-US" altLang="zh-CN" sz="1000" b="1"/>
+          </a:p>
+          <a:p>
+            <a:endParaRPr lang="en-US" altLang="zh-CN" sz="1000"/>
+          </a:p>
+          <a:p>
+            <a:r>
+              <a:rPr lang="zh-CN" altLang="en-US" sz="1000"/>
+              <a:t>const express = require("express");</a:t>
+            </a:r>
+            <a:endParaRPr lang="zh-CN" altLang="en-US" sz="1000"/>
+          </a:p>
+          <a:p>
+            <a:r>
+              <a:rPr lang="zh-CN" altLang="en-US" sz="1000"/>
+              <a:t>const bodyParser = require("body-parser")</a:t>
+            </a:r>
+            <a:endParaRPr lang="zh-CN" altLang="en-US" sz="1000"/>
+          </a:p>
+          <a:p>
+            <a:endParaRPr lang="zh-CN" altLang="en-US" sz="1000"/>
+          </a:p>
+          <a:p>
+            <a:r>
+              <a:rPr lang="zh-CN" altLang="en-US" sz="1000"/>
+              <a:t>// New app using express module</a:t>
+            </a:r>
+            <a:endParaRPr lang="zh-CN" altLang="en-US" sz="1000"/>
+          </a:p>
+          <a:p>
+            <a:r>
+              <a:rPr lang="zh-CN" altLang="en-US" sz="1000"/>
+              <a:t>const app = express();</a:t>
+            </a:r>
+            <a:endParaRPr lang="zh-CN" altLang="en-US" sz="1000"/>
+          </a:p>
+          <a:p>
+            <a:r>
+              <a:rPr lang="zh-CN" altLang="en-US" sz="1000"/>
+              <a:t>app.use(bodyParser.urlencoded({</a:t>
+            </a:r>
+            <a:endParaRPr lang="zh-CN" altLang="en-US" sz="1000"/>
+          </a:p>
+          <a:p>
+            <a:r>
+              <a:rPr lang="zh-CN" altLang="en-US" sz="1000"/>
+              <a:t>  extended:true</a:t>
+            </a:r>
+            <a:endParaRPr lang="zh-CN" altLang="en-US" sz="1000"/>
+          </a:p>
+          <a:p>
+            <a:r>
+              <a:rPr lang="zh-CN" altLang="en-US" sz="1000"/>
+              <a:t>}));</a:t>
+            </a:r>
+            <a:endParaRPr lang="zh-CN" altLang="en-US" sz="1000"/>
+          </a:p>
+          <a:p>
+            <a:endParaRPr lang="zh-CN" altLang="en-US" sz="1000"/>
+          </a:p>
+          <a:p>
+            <a:r>
+              <a:rPr lang="zh-CN" altLang="en-US" sz="1000"/>
+              <a:t>app.get("/", function(req, res) {</a:t>
+            </a:r>
+            <a:endParaRPr lang="zh-CN" altLang="en-US" sz="1000"/>
+          </a:p>
+          <a:p>
+            <a:r>
+              <a:rPr lang="zh-CN" altLang="en-US" sz="1000"/>
+              <a:t>  console.log('Received get request')</a:t>
+            </a:r>
+            <a:endParaRPr lang="zh-CN" altLang="en-US" sz="1000"/>
+          </a:p>
+          <a:p>
+            <a:r>
+              <a:rPr lang="zh-CN" altLang="en-US" sz="1000"/>
+              <a:t>  res.send('Received get request')</a:t>
+            </a:r>
+            <a:endParaRPr lang="zh-CN" altLang="en-US" sz="1000"/>
+          </a:p>
+          <a:p>
+            <a:r>
+              <a:rPr lang="zh-CN" altLang="en-US" sz="1000"/>
+              <a:t>});</a:t>
+            </a:r>
+            <a:endParaRPr lang="zh-CN" altLang="en-US" sz="1000"/>
+          </a:p>
+          <a:p>
+            <a:endParaRPr lang="zh-CN" altLang="en-US" sz="1000"/>
+          </a:p>
+          <a:p>
+            <a:r>
+              <a:rPr lang="zh-CN" altLang="en-US" sz="1000"/>
+              <a:t>app.post("/qrcode", function(req, res) {</a:t>
+            </a:r>
+            <a:endParaRPr lang="zh-CN" altLang="en-US" sz="1000"/>
+          </a:p>
+          <a:p>
+            <a:r>
+              <a:rPr lang="zh-CN" altLang="en-US" sz="1000"/>
+              <a:t>  res.send("Received post request, body=", req.body);</a:t>
+            </a:r>
+            <a:endParaRPr lang="zh-CN" altLang="en-US" sz="1000"/>
+          </a:p>
+          <a:p>
+            <a:r>
+              <a:rPr lang="zh-CN" altLang="en-US" sz="1000"/>
+              <a:t>});</a:t>
+            </a:r>
+            <a:endParaRPr lang="zh-CN" altLang="en-US" sz="1000"/>
+          </a:p>
+          <a:p>
+            <a:endParaRPr lang="zh-CN" altLang="en-US" sz="1000"/>
+          </a:p>
+          <a:p>
+            <a:r>
+              <a:rPr lang="zh-CN" altLang="en-US" sz="1000"/>
+              <a:t>app.listen(8080, function(){</a:t>
+            </a:r>
+            <a:endParaRPr lang="zh-CN" altLang="en-US" sz="1000"/>
+          </a:p>
+          <a:p>
+            <a:r>
+              <a:rPr lang="zh-CN" altLang="en-US" sz="1000"/>
+              <a:t>  console.log("server is running on port 8080");</a:t>
+            </a:r>
+            <a:endParaRPr lang="zh-CN" altLang="en-US" sz="1000"/>
+          </a:p>
+          <a:p>
+            <a:r>
+              <a:rPr lang="zh-CN" altLang="en-US" sz="1000"/>
               <a:t>})</a:t>
             </a:r>
-            <a:endParaRPr lang="zh-CN" altLang="en-US" sz="1200"/>
-          </a:p>
-          <a:p>
-            <a:endParaRPr lang="zh-CN" altLang="en-US" sz="1200"/>
-          </a:p>
-          <a:p>
-            <a:r>
-              <a:rPr lang="zh-CN" altLang="en-US" sz="1200"/>
-              <a:t>//3.2 post请求</a:t>
-            </a:r>
-            <a:endParaRPr lang="zh-CN" altLang="en-US" sz="1200"/>
-          </a:p>
-          <a:p>
-            <a:r>
-              <a:rPr lang="zh-CN" altLang="en-US" sz="1200"/>
-              <a:t>server.post('/', function (request, response) {</a:t>
-            </a:r>
-            <a:endParaRPr lang="zh-CN" altLang="en-US" sz="1200"/>
-          </a:p>
-          <a:p>
-            <a:r>
-              <a:rPr lang="zh-CN" altLang="en-US" sz="1200"/>
-              <a:t>    response.send('post请求成功')</a:t>
-            </a:r>
-            <a:endParaRPr lang="zh-CN" altLang="en-US" sz="1200"/>
-          </a:p>
-          <a:p>
-            <a:r>
-              <a:rPr lang="zh-CN" altLang="en-US" sz="1200"/>
-              <a:t>})</a:t>
-            </a:r>
-            <a:endParaRPr lang="zh-CN" altLang="en-US" sz="1200"/>
-          </a:p>
-          <a:p>
-            <a:endParaRPr lang="zh-CN" altLang="en-US" sz="1200"/>
-          </a:p>
-          <a:p>
-            <a:r>
-              <a:rPr lang="zh-CN" altLang="en-US" sz="1200"/>
-              <a:t>//4. 绑定端口</a:t>
-            </a:r>
-            <a:endParaRPr lang="zh-CN" altLang="en-US" sz="1200"/>
-          </a:p>
-          <a:p>
-            <a:r>
-              <a:rPr lang="zh-CN" altLang="en-US" sz="1200"/>
-              <a:t>server.listen(4040)</a:t>
-            </a:r>
-            <a:endParaRPr lang="zh-CN" altLang="en-US" sz="1200"/>
-          </a:p>
-          <a:p>
-            <a:r>
-              <a:rPr lang="zh-CN" altLang="en-US" sz="1200"/>
-              <a:t>console.log('启动4040')</a:t>
-            </a:r>
-            <a:endParaRPr lang="zh-CN" altLang="en-US" sz="1200"/>
+            <a:endParaRPr lang="zh-CN" altLang="en-US" sz="1000"/>
+          </a:p>
+        </p:txBody>
+      </p:sp>
+      <p:sp>
+        <p:nvSpPr>
+          <p:cNvPr id="6" name="文本框 5"/>
+          <p:cNvSpPr txBox="1"/>
+          <p:nvPr/>
+        </p:nvSpPr>
+        <p:spPr>
+          <a:xfrm>
+            <a:off x="6980555" y="4037330"/>
+            <a:ext cx="4266565" cy="2553335"/>
+          </a:xfrm>
+          <a:prstGeom prst="rect">
+            <a:avLst/>
+          </a:prstGeom>
+          <a:noFill/>
+          <a:ln>
+            <a:solidFill>
+              <a:srgbClr val="C00000"/>
+            </a:solidFill>
+          </a:ln>
+        </p:spPr>
+        <p:txBody>
+          <a:bodyPr wrap="square" rtlCol="0" anchor="t">
+            <a:spAutoFit/>
+          </a:bodyPr>
+          <a:p>
+            <a:r>
+              <a:rPr lang="en-US" altLang="zh-CN" sz="1000" b="1"/>
+              <a:t>package.json</a:t>
+            </a:r>
+            <a:endParaRPr lang="en-US" altLang="zh-CN" sz="1000" b="1"/>
+          </a:p>
+          <a:p>
+            <a:endParaRPr lang="en-US" altLang="zh-CN" sz="1000"/>
+          </a:p>
+          <a:p>
+            <a:r>
+              <a:rPr lang="zh-CN" altLang="en-US" sz="1000"/>
+              <a:t>{</a:t>
+            </a:r>
+            <a:endParaRPr lang="zh-CN" altLang="en-US" sz="1000"/>
+          </a:p>
+          <a:p>
+            <a:r>
+              <a:rPr lang="zh-CN" altLang="en-US" sz="1000"/>
+              <a:t>  "name": "docker_web_app",</a:t>
+            </a:r>
+            <a:endParaRPr lang="zh-CN" altLang="en-US" sz="1000"/>
+          </a:p>
+          <a:p>
+            <a:r>
+              <a:rPr lang="zh-CN" altLang="en-US" sz="1000"/>
+              <a:t>  "version": "1.0.0",</a:t>
+            </a:r>
+            <a:endParaRPr lang="zh-CN" altLang="en-US" sz="1000"/>
+          </a:p>
+          <a:p>
+            <a:r>
+              <a:rPr lang="zh-CN" altLang="en-US" sz="1000"/>
+              <a:t>  "description": "Node.js on Docker",</a:t>
+            </a:r>
+            <a:endParaRPr lang="zh-CN" altLang="en-US" sz="1000"/>
+          </a:p>
+          <a:p>
+            <a:r>
+              <a:rPr lang="zh-CN" altLang="en-US" sz="1000"/>
+              <a:t>  "author": "First Last &lt;first.last@example.com&gt;",</a:t>
+            </a:r>
+            <a:endParaRPr lang="zh-CN" altLang="en-US" sz="1000"/>
+          </a:p>
+          <a:p>
+            <a:r>
+              <a:rPr lang="zh-CN" altLang="en-US" sz="1000"/>
+              <a:t>  "main": "server.js",</a:t>
+            </a:r>
+            <a:endParaRPr lang="zh-CN" altLang="en-US" sz="1000"/>
+          </a:p>
+          <a:p>
+            <a:r>
+              <a:rPr lang="zh-CN" altLang="en-US" sz="1000"/>
+              <a:t>  "scripts": {</a:t>
+            </a:r>
+            <a:endParaRPr lang="zh-CN" altLang="en-US" sz="1000"/>
+          </a:p>
+          <a:p>
+            <a:r>
+              <a:rPr lang="zh-CN" altLang="en-US" sz="1000"/>
+              <a:t>    "start": "node server.js"</a:t>
+            </a:r>
+            <a:endParaRPr lang="zh-CN" altLang="en-US" sz="1000"/>
+          </a:p>
+          <a:p>
+            <a:r>
+              <a:rPr lang="zh-CN" altLang="en-US" sz="1000"/>
+              <a:t>  },</a:t>
+            </a:r>
+            <a:endParaRPr lang="zh-CN" altLang="en-US" sz="1000"/>
+          </a:p>
+          <a:p>
+            <a:r>
+              <a:rPr lang="zh-CN" altLang="en-US" sz="1000"/>
+              <a:t>  "dependencies": {</a:t>
+            </a:r>
+            <a:endParaRPr lang="zh-CN" altLang="en-US" sz="1000"/>
+          </a:p>
+          <a:p>
+            <a:r>
+              <a:rPr lang="zh-CN" altLang="en-US" sz="1000"/>
+              <a:t>    "express": "^4.16.1",</a:t>
+            </a:r>
+            <a:endParaRPr lang="zh-CN" altLang="en-US" sz="1000"/>
+          </a:p>
+          <a:p>
+            <a:r>
+              <a:rPr lang="zh-CN" altLang="en-US" sz="1000"/>
+              <a:t>    "body-parser": "^1.19.1"</a:t>
+            </a:r>
+            <a:endParaRPr lang="zh-CN" altLang="en-US" sz="1000"/>
+          </a:p>
+          <a:p>
+            <a:r>
+              <a:rPr lang="zh-CN" altLang="en-US" sz="1000"/>
+              <a:t>  }</a:t>
+            </a:r>
+            <a:endParaRPr lang="zh-CN" altLang="en-US" sz="1000"/>
+          </a:p>
+          <a:p>
+            <a:r>
+              <a:rPr lang="zh-CN" altLang="en-US" sz="1000"/>
+              <a:t>}</a:t>
+            </a:r>
+            <a:endParaRPr lang="zh-CN" altLang="en-US" sz="1000"/>
           </a:p>
         </p:txBody>
       </p:sp>
@@ -5252,7 +5021,7 @@
           <a:p>
             <a:r>
               <a:rPr lang="en-US" altLang="zh-CN"/>
-              <a:t>Module Import and Export</a:t>
+              <a:t>Web Server using Docker</a:t>
             </a:r>
             <a:endParaRPr lang="en-US" altLang="zh-CN"/>
           </a:p>
@@ -5268,87 +5037,266 @@
             <p:ph idx="1"/>
           </p:nvPr>
         </p:nvSpPr>
-        <p:spPr/>
+        <p:spPr>
+          <a:xfrm>
+            <a:off x="838200" y="1211580"/>
+            <a:ext cx="6300470" cy="4549140"/>
+          </a:xfrm>
+        </p:spPr>
         <p:txBody>
           <a:bodyPr/>
           <a:p>
-            <a:r>
-              <a:rPr lang="en-US" altLang="zh-CN"/>
-              <a:t>References</a:t>
-            </a:r>
-            <a:endParaRPr lang="en-US" altLang="zh-CN"/>
-          </a:p>
-          <a:p>
-            <a:pPr lvl="1"/>
-            <a:r>
-              <a:rPr lang="en-US" altLang="zh-CN"/>
-              <a:t>https://www.freecodecamp.org/news/requiring-modules-in-node-js-everything-you-need-to-know-e7fbd119be8</a:t>
-            </a:r>
-            <a:endParaRPr lang="en-US" altLang="zh-CN"/>
-          </a:p>
-          <a:p>
             <a:pPr lvl="0"/>
             <a:r>
-              <a:rPr lang="en-US" altLang="zh-CN"/>
-              <a:t>require(‘module’)</a:t>
-            </a:r>
-            <a:endParaRPr lang="en-US" altLang="zh-CN"/>
-          </a:p>
-          <a:p>
-            <a:pPr lvl="1"/>
-            <a:r>
-              <a:rPr lang="en-US" altLang="zh-CN"/>
-              <a:t>steps: resolving, loading, wrapping, evaluating, caching</a:t>
-            </a:r>
-            <a:endParaRPr lang="en-US" altLang="zh-CN"/>
-          </a:p>
-          <a:p>
-            <a:pPr lvl="1"/>
-            <a:r>
-              <a:rPr lang="en-US" altLang="zh-CN"/>
-              <a:t>resolving</a:t>
-            </a:r>
-            <a:endParaRPr lang="en-US" altLang="zh-CN"/>
-          </a:p>
-          <a:p>
-            <a:pPr lvl="2"/>
-            <a:r>
-              <a:rPr lang="en-US" altLang="zh-CN"/>
-              <a:t>module.paths</a:t>
-            </a:r>
-            <a:endParaRPr lang="en-US" altLang="zh-CN"/>
-          </a:p>
-          <a:p>
-            <a:pPr lvl="2"/>
-            <a:r>
-              <a:rPr lang="en-US" altLang="zh-CN"/>
-              <a:t>index.js is used by default if require a folder</a:t>
-            </a:r>
-            <a:endParaRPr lang="en-US" altLang="zh-CN"/>
-          </a:p>
-          <a:p>
-            <a:pPr lvl="2"/>
-            <a:r>
-              <a:rPr lang="en-US" altLang="zh-CN"/>
-              <a:t>main property in package.json is used if require a folder</a:t>
-            </a:r>
-            <a:endParaRPr lang="en-US" altLang="zh-CN"/>
-          </a:p>
-          <a:p>
-            <a:pPr lvl="1"/>
-            <a:r>
-              <a:rPr lang="en-US" altLang="zh-CN"/>
-              <a:t>require.resolve</a:t>
-            </a:r>
-            <a:endParaRPr lang="en-US" altLang="zh-CN"/>
-          </a:p>
-          <a:p>
-            <a:pPr lvl="2"/>
-            <a:r>
-              <a:rPr lang="en-US" altLang="zh-CN"/>
-              <a:t>Only resolving, no other steps</a:t>
-            </a:r>
-            <a:endParaRPr lang="en-US" altLang="zh-CN"/>
+              <a:rPr lang="en-US" altLang="zh-CN" sz="2400">
+                <a:sym typeface="+mn-ea"/>
+              </a:rPr>
+              <a:t>Docker</a:t>
+            </a:r>
+            <a:endParaRPr lang="en-US" altLang="zh-CN" sz="2400"/>
+          </a:p>
+          <a:p>
+            <a:pPr lvl="1"/>
+            <a:r>
+              <a:rPr lang="en-US" altLang="zh-CN" sz="2400">
+                <a:sym typeface="+mn-ea"/>
+              </a:rPr>
+              <a:t>create Dockerfile</a:t>
+            </a:r>
+            <a:endParaRPr lang="en-US" altLang="zh-CN" sz="2400"/>
+          </a:p>
+          <a:p>
+            <a:pPr lvl="1"/>
+            <a:r>
+              <a:rPr lang="en-US" altLang="zh-CN" sz="2400">
+                <a:sym typeface="+mn-ea"/>
+              </a:rPr>
+              <a:t>create server.js</a:t>
+            </a:r>
+            <a:endParaRPr lang="en-US" altLang="zh-CN" sz="2400"/>
+          </a:p>
+          <a:p>
+            <a:pPr lvl="1"/>
+            <a:r>
+              <a:rPr lang="en-US" altLang="zh-CN" sz="2400">
+                <a:sym typeface="+mn-ea"/>
+              </a:rPr>
+              <a:t>run “docker build . -t node-web-app”</a:t>
+            </a:r>
+            <a:endParaRPr lang="en-US" altLang="zh-CN" sz="2400">
+              <a:sym typeface="+mn-ea"/>
+            </a:endParaRPr>
+          </a:p>
+          <a:p>
+            <a:pPr lvl="1"/>
+            <a:r>
+              <a:rPr lang="en-US" altLang="zh-CN" sz="2400">
+                <a:sym typeface="+mn-ea"/>
+              </a:rPr>
+              <a:t>run “docker run -p 8080:8080 -d node-web-app”</a:t>
+            </a:r>
+            <a:endParaRPr lang="zh-CN" altLang="en-US"/>
+          </a:p>
+        </p:txBody>
+      </p:sp>
+      <p:sp>
+        <p:nvSpPr>
+          <p:cNvPr id="5" name="文本框 4"/>
+          <p:cNvSpPr txBox="1"/>
+          <p:nvPr/>
+        </p:nvSpPr>
+        <p:spPr>
+          <a:xfrm>
+            <a:off x="7287895" y="1317625"/>
+            <a:ext cx="4267200" cy="3476625"/>
+          </a:xfrm>
+          <a:prstGeom prst="rect">
+            <a:avLst/>
+          </a:prstGeom>
+          <a:noFill/>
+          <a:ln>
+            <a:solidFill>
+              <a:srgbClr val="C00000"/>
+            </a:solidFill>
+          </a:ln>
+        </p:spPr>
+        <p:txBody>
+          <a:bodyPr wrap="square" rtlCol="0" anchor="t">
+            <a:spAutoFit/>
+          </a:bodyPr>
+          <a:p>
+            <a:r>
+              <a:rPr lang="en-US" altLang="zh-CN" sz="1000" b="1"/>
+              <a:t>Dockerfile</a:t>
+            </a:r>
+            <a:endParaRPr lang="en-US" altLang="zh-CN" sz="1000" b="1"/>
+          </a:p>
+          <a:p>
+            <a:endParaRPr lang="en-US" altLang="zh-CN" sz="1000"/>
+          </a:p>
+          <a:p>
+            <a:r>
+              <a:rPr lang="en-US" altLang="zh-CN" sz="1000"/>
+              <a:t>FROM node:16</a:t>
+            </a:r>
+            <a:endParaRPr lang="en-US" altLang="zh-CN" sz="1000"/>
+          </a:p>
+          <a:p>
+            <a:endParaRPr lang="en-US" altLang="zh-CN" sz="1000"/>
+          </a:p>
+          <a:p>
+            <a:r>
+              <a:rPr lang="en-US" altLang="zh-CN" sz="1000"/>
+              <a:t># Create app directory</a:t>
+            </a:r>
+            <a:endParaRPr lang="en-US" altLang="zh-CN" sz="1000"/>
+          </a:p>
+          <a:p>
+            <a:r>
+              <a:rPr lang="en-US" altLang="zh-CN" sz="1000"/>
+              <a:t>WORKDIR /usr/src/app</a:t>
+            </a:r>
+            <a:endParaRPr lang="en-US" altLang="zh-CN" sz="1000"/>
+          </a:p>
+          <a:p>
+            <a:endParaRPr lang="en-US" altLang="zh-CN" sz="1000"/>
+          </a:p>
+          <a:p>
+            <a:r>
+              <a:rPr lang="en-US" altLang="zh-CN" sz="1000"/>
+              <a:t># Install app dependencies</a:t>
+            </a:r>
+            <a:endParaRPr lang="en-US" altLang="zh-CN" sz="1000"/>
+          </a:p>
+          <a:p>
+            <a:r>
+              <a:rPr lang="en-US" altLang="zh-CN" sz="1000"/>
+              <a:t># A wildcard is used to ensure both package.json AND package-lock.json are copied</a:t>
+            </a:r>
+            <a:endParaRPr lang="en-US" altLang="zh-CN" sz="1000"/>
+          </a:p>
+          <a:p>
+            <a:r>
+              <a:rPr lang="en-US" altLang="zh-CN" sz="1000"/>
+              <a:t># where available (npm@5+)</a:t>
+            </a:r>
+            <a:endParaRPr lang="en-US" altLang="zh-CN" sz="1000"/>
+          </a:p>
+          <a:p>
+            <a:r>
+              <a:rPr lang="en-US" altLang="zh-CN" sz="1000"/>
+              <a:t>COPY package*.json ./</a:t>
+            </a:r>
+            <a:endParaRPr lang="en-US" altLang="zh-CN" sz="1000"/>
+          </a:p>
+          <a:p>
+            <a:endParaRPr lang="en-US" altLang="zh-CN" sz="1000"/>
+          </a:p>
+          <a:p>
+            <a:r>
+              <a:rPr lang="en-US" altLang="zh-CN" sz="1000"/>
+              <a:t>RUN npm install</a:t>
+            </a:r>
+            <a:endParaRPr lang="en-US" altLang="zh-CN" sz="1000"/>
+          </a:p>
+          <a:p>
+            <a:r>
+              <a:rPr lang="en-US" altLang="zh-CN" sz="1000"/>
+              <a:t># If you are building your code for production</a:t>
+            </a:r>
+            <a:endParaRPr lang="en-US" altLang="zh-CN" sz="1000"/>
+          </a:p>
+          <a:p>
+            <a:r>
+              <a:rPr lang="en-US" altLang="zh-CN" sz="1000"/>
+              <a:t># RUN npm ci --only=production</a:t>
+            </a:r>
+            <a:endParaRPr lang="en-US" altLang="zh-CN" sz="1000"/>
+          </a:p>
+          <a:p>
+            <a:endParaRPr lang="en-US" altLang="zh-CN" sz="1000"/>
+          </a:p>
+          <a:p>
+            <a:r>
+              <a:rPr lang="en-US" altLang="zh-CN" sz="1000"/>
+              <a:t># Bundle app source</a:t>
+            </a:r>
+            <a:endParaRPr lang="en-US" altLang="zh-CN" sz="1000"/>
+          </a:p>
+          <a:p>
+            <a:r>
+              <a:rPr lang="en-US" altLang="zh-CN" sz="1000"/>
+              <a:t>COPY . .</a:t>
+            </a:r>
+            <a:endParaRPr lang="en-US" altLang="zh-CN" sz="1000"/>
+          </a:p>
+          <a:p>
+            <a:endParaRPr lang="en-US" altLang="zh-CN" sz="1000"/>
+          </a:p>
+          <a:p>
+            <a:r>
+              <a:rPr lang="en-US" altLang="zh-CN" sz="1000"/>
+              <a:t>EXPOSE 8080</a:t>
+            </a:r>
+            <a:endParaRPr lang="en-US" altLang="zh-CN" sz="1000"/>
+          </a:p>
+          <a:p>
+            <a:r>
+              <a:rPr lang="en-US" altLang="zh-CN" sz="1000"/>
+              <a:t>CMD [ "node", "server.js" ]</a:t>
+            </a:r>
+            <a:endParaRPr lang="en-US" altLang="zh-CN" sz="1000"/>
+          </a:p>
+        </p:txBody>
+      </p:sp>
+      <p:sp>
+        <p:nvSpPr>
+          <p:cNvPr id="4" name="文本框 3"/>
+          <p:cNvSpPr txBox="1"/>
+          <p:nvPr/>
+        </p:nvSpPr>
+        <p:spPr>
+          <a:xfrm>
+            <a:off x="7287895" y="5197475"/>
+            <a:ext cx="2540000" cy="706755"/>
+          </a:xfrm>
+          <a:prstGeom prst="rect">
+            <a:avLst/>
+          </a:prstGeom>
+          <a:noFill/>
+          <a:ln>
+            <a:solidFill>
+              <a:srgbClr val="C00000"/>
+            </a:solidFill>
+          </a:ln>
+        </p:spPr>
+        <p:txBody>
+          <a:bodyPr wrap="square" rtlCol="0" anchor="t">
+            <a:spAutoFit/>
+          </a:bodyPr>
+          <a:p>
+            <a:r>
+              <a:rPr lang="en-US" altLang="zh-CN" sz="1000" b="1"/>
+              <a:t>.dockerignore</a:t>
+            </a:r>
+            <a:endParaRPr lang="en-US" altLang="zh-CN" sz="1000" b="1"/>
+          </a:p>
+          <a:p>
+            <a:endParaRPr lang="en-US" altLang="zh-CN" sz="1000"/>
+          </a:p>
+          <a:p>
+            <a:r>
+              <a:rPr lang="zh-CN" altLang="en-US" sz="1000"/>
+              <a:t>node_modules</a:t>
+            </a:r>
+            <a:endParaRPr lang="zh-CN" altLang="en-US" sz="1000"/>
+          </a:p>
+          <a:p>
+            <a:r>
+              <a:rPr lang="zh-CN" altLang="en-US" sz="1000"/>
+              <a:t>npm-debug.log</a:t>
+            </a:r>
+            <a:endParaRPr lang="zh-CN" altLang="en-US" sz="1000"/>
           </a:p>
         </p:txBody>
       </p:sp>
@@ -5364,6 +5312,388 @@
 </file>
 
 <file path=ppt/slides/slide17.xml><?xml version="1.0" encoding="utf-8"?>
+<p:sld xmlns:a="http://schemas.openxmlformats.org/drawingml/2006/main" xmlns:r="http://schemas.openxmlformats.org/officeDocument/2006/relationships" xmlns:p="http://schemas.openxmlformats.org/presentationml/2006/main">
+  <p:cSld>
+    <p:spTree>
+      <p:nvGrpSpPr>
+        <p:cNvPr id="1" name=""/>
+        <p:cNvGrpSpPr/>
+        <p:nvPr/>
+      </p:nvGrpSpPr>
+      <p:grpSpPr/>
+      <p:sp>
+        <p:nvSpPr>
+          <p:cNvPr id="2" name="标题 1"/>
+          <p:cNvSpPr>
+            <a:spLocks noGrp="1"/>
+          </p:cNvSpPr>
+          <p:nvPr>
+            <p:ph type="title"/>
+          </p:nvPr>
+        </p:nvSpPr>
+        <p:spPr/>
+        <p:txBody>
+          <a:bodyPr/>
+          <a:p>
+            <a:r>
+              <a:rPr lang="en-US" altLang="zh-CN"/>
+              <a:t>Express</a:t>
+            </a:r>
+            <a:endParaRPr lang="en-US" altLang="zh-CN"/>
+          </a:p>
+        </p:txBody>
+      </p:sp>
+      <p:sp>
+        <p:nvSpPr>
+          <p:cNvPr id="3" name="内容占位符 2"/>
+          <p:cNvSpPr>
+            <a:spLocks noGrp="1"/>
+          </p:cNvSpPr>
+          <p:nvPr>
+            <p:ph idx="1"/>
+          </p:nvPr>
+        </p:nvSpPr>
+        <p:spPr>
+          <a:xfrm>
+            <a:off x="838200" y="1211580"/>
+            <a:ext cx="5095240" cy="4549140"/>
+          </a:xfrm>
+        </p:spPr>
+        <p:txBody>
+          <a:bodyPr/>
+          <a:p>
+            <a:r>
+              <a:rPr lang="en-US" altLang="zh-CN"/>
+              <a:t>Steps</a:t>
+            </a:r>
+            <a:endParaRPr lang="en-US" altLang="zh-CN"/>
+          </a:p>
+        </p:txBody>
+      </p:sp>
+      <p:sp>
+        <p:nvSpPr>
+          <p:cNvPr id="4" name="文本框 3"/>
+          <p:cNvSpPr txBox="1"/>
+          <p:nvPr/>
+        </p:nvSpPr>
+        <p:spPr>
+          <a:xfrm>
+            <a:off x="7767955" y="1167130"/>
+            <a:ext cx="3677285" cy="4523105"/>
+          </a:xfrm>
+          <a:prstGeom prst="rect">
+            <a:avLst/>
+          </a:prstGeom>
+          <a:noFill/>
+          <a:ln>
+            <a:solidFill>
+              <a:srgbClr val="C00000"/>
+            </a:solidFill>
+          </a:ln>
+        </p:spPr>
+        <p:txBody>
+          <a:bodyPr wrap="square" rtlCol="0" anchor="t">
+            <a:spAutoFit/>
+          </a:bodyPr>
+          <a:p>
+            <a:r>
+              <a:rPr lang="zh-CN" altLang="en-US" sz="1200"/>
+              <a:t>/* express的服务器 */</a:t>
+            </a:r>
+            <a:endParaRPr lang="zh-CN" altLang="en-US" sz="1200"/>
+          </a:p>
+          <a:p>
+            <a:endParaRPr lang="zh-CN" altLang="en-US" sz="1200"/>
+          </a:p>
+          <a:p>
+            <a:r>
+              <a:rPr lang="zh-CN" altLang="en-US" sz="1200"/>
+              <a:t>//1. 导入express</a:t>
+            </a:r>
+            <a:endParaRPr lang="zh-CN" altLang="en-US" sz="1200"/>
+          </a:p>
+          <a:p>
+            <a:r>
+              <a:rPr lang="zh-CN" altLang="en-US" sz="1200"/>
+              <a:t>var express = require('express')</a:t>
+            </a:r>
+            <a:endParaRPr lang="zh-CN" altLang="en-US" sz="1200"/>
+          </a:p>
+          <a:p>
+            <a:endParaRPr lang="zh-CN" altLang="en-US" sz="1200"/>
+          </a:p>
+          <a:p>
+            <a:r>
+              <a:rPr lang="zh-CN" altLang="en-US" sz="1200"/>
+              <a:t>//2. 创建express服务器</a:t>
+            </a:r>
+            <a:endParaRPr lang="zh-CN" altLang="en-US" sz="1200"/>
+          </a:p>
+          <a:p>
+            <a:r>
+              <a:rPr lang="zh-CN" altLang="en-US" sz="1200"/>
+              <a:t>var server = express()</a:t>
+            </a:r>
+            <a:endParaRPr lang="zh-CN" altLang="en-US" sz="1200"/>
+          </a:p>
+          <a:p>
+            <a:endParaRPr lang="zh-CN" altLang="en-US" sz="1200"/>
+          </a:p>
+          <a:p>
+            <a:r>
+              <a:rPr lang="zh-CN" altLang="en-US" sz="1200"/>
+              <a:t>//3. 访问服务器(get或者post)</a:t>
+            </a:r>
+            <a:endParaRPr lang="zh-CN" altLang="en-US" sz="1200"/>
+          </a:p>
+          <a:p>
+            <a:r>
+              <a:rPr lang="zh-CN" altLang="en-US" sz="1200"/>
+              <a:t>//参数一: 请求根路径</a:t>
+            </a:r>
+            <a:endParaRPr lang="zh-CN" altLang="en-US" sz="1200"/>
+          </a:p>
+          <a:p>
+            <a:r>
+              <a:rPr lang="zh-CN" altLang="en-US" sz="1200"/>
+              <a:t>//3.1 get请求</a:t>
+            </a:r>
+            <a:endParaRPr lang="zh-CN" altLang="en-US" sz="1200"/>
+          </a:p>
+          <a:p>
+            <a:r>
+              <a:rPr lang="zh-CN" altLang="en-US" sz="1200"/>
+              <a:t>server.get('/', function (request, response) {</a:t>
+            </a:r>
+            <a:endParaRPr lang="zh-CN" altLang="en-US" sz="1200"/>
+          </a:p>
+          <a:p>
+            <a:r>
+              <a:rPr lang="zh-CN" altLang="en-US" sz="1200"/>
+              <a:t>    // console.log(request)</a:t>
+            </a:r>
+            <a:endParaRPr lang="zh-CN" altLang="en-US" sz="1200"/>
+          </a:p>
+          <a:p>
+            <a:r>
+              <a:rPr lang="zh-CN" altLang="en-US" sz="1200"/>
+              <a:t>    response.send('get请求成功')</a:t>
+            </a:r>
+            <a:endParaRPr lang="zh-CN" altLang="en-US" sz="1200"/>
+          </a:p>
+          <a:p>
+            <a:r>
+              <a:rPr lang="zh-CN" altLang="en-US" sz="1200"/>
+              <a:t>})</a:t>
+            </a:r>
+            <a:endParaRPr lang="zh-CN" altLang="en-US" sz="1200"/>
+          </a:p>
+          <a:p>
+            <a:endParaRPr lang="zh-CN" altLang="en-US" sz="1200"/>
+          </a:p>
+          <a:p>
+            <a:r>
+              <a:rPr lang="zh-CN" altLang="en-US" sz="1200"/>
+              <a:t>//3.2 post请求</a:t>
+            </a:r>
+            <a:endParaRPr lang="zh-CN" altLang="en-US" sz="1200"/>
+          </a:p>
+          <a:p>
+            <a:r>
+              <a:rPr lang="zh-CN" altLang="en-US" sz="1200"/>
+              <a:t>server.post('/', function (request, response) {</a:t>
+            </a:r>
+            <a:endParaRPr lang="zh-CN" altLang="en-US" sz="1200"/>
+          </a:p>
+          <a:p>
+            <a:r>
+              <a:rPr lang="zh-CN" altLang="en-US" sz="1200"/>
+              <a:t>    response.send('post请求成功')</a:t>
+            </a:r>
+            <a:endParaRPr lang="zh-CN" altLang="en-US" sz="1200"/>
+          </a:p>
+          <a:p>
+            <a:r>
+              <a:rPr lang="zh-CN" altLang="en-US" sz="1200"/>
+              <a:t>})</a:t>
+            </a:r>
+            <a:endParaRPr lang="zh-CN" altLang="en-US" sz="1200"/>
+          </a:p>
+          <a:p>
+            <a:endParaRPr lang="zh-CN" altLang="en-US" sz="1200"/>
+          </a:p>
+          <a:p>
+            <a:r>
+              <a:rPr lang="zh-CN" altLang="en-US" sz="1200"/>
+              <a:t>//4. 绑定端口</a:t>
+            </a:r>
+            <a:endParaRPr lang="zh-CN" altLang="en-US" sz="1200"/>
+          </a:p>
+          <a:p>
+            <a:r>
+              <a:rPr lang="zh-CN" altLang="en-US" sz="1200"/>
+              <a:t>server.listen(4040)</a:t>
+            </a:r>
+            <a:endParaRPr lang="zh-CN" altLang="en-US" sz="1200"/>
+          </a:p>
+          <a:p>
+            <a:r>
+              <a:rPr lang="zh-CN" altLang="en-US" sz="1200"/>
+              <a:t>console.log('启动4040')</a:t>
+            </a:r>
+            <a:endParaRPr lang="zh-CN" altLang="en-US" sz="1200"/>
+          </a:p>
+        </p:txBody>
+      </p:sp>
+    </p:spTree>
+    <p:custDataLst>
+      <p:tags r:id="rId1"/>
+    </p:custDataLst>
+  </p:cSld>
+  <p:clrMapOvr>
+    <a:masterClrMapping/>
+  </p:clrMapOvr>
+</p:sld>
+</file>
+
+<file path=ppt/slides/slide18.xml><?xml version="1.0" encoding="utf-8"?>
+<p:sld xmlns:a="http://schemas.openxmlformats.org/drawingml/2006/main" xmlns:r="http://schemas.openxmlformats.org/officeDocument/2006/relationships" xmlns:p="http://schemas.openxmlformats.org/presentationml/2006/main">
+  <p:cSld>
+    <p:spTree>
+      <p:nvGrpSpPr>
+        <p:cNvPr id="1" name=""/>
+        <p:cNvGrpSpPr/>
+        <p:nvPr/>
+      </p:nvGrpSpPr>
+      <p:grpSpPr/>
+      <p:sp>
+        <p:nvSpPr>
+          <p:cNvPr id="2" name="标题 1"/>
+          <p:cNvSpPr>
+            <a:spLocks noGrp="1"/>
+          </p:cNvSpPr>
+          <p:nvPr>
+            <p:ph type="title"/>
+          </p:nvPr>
+        </p:nvSpPr>
+        <p:spPr/>
+        <p:txBody>
+          <a:bodyPr/>
+          <a:p>
+            <a:r>
+              <a:rPr lang="en-US" altLang="zh-CN"/>
+              <a:t>Module Import and Export</a:t>
+            </a:r>
+            <a:endParaRPr lang="en-US" altLang="zh-CN"/>
+          </a:p>
+        </p:txBody>
+      </p:sp>
+      <p:sp>
+        <p:nvSpPr>
+          <p:cNvPr id="3" name="内容占位符 2"/>
+          <p:cNvSpPr>
+            <a:spLocks noGrp="1"/>
+          </p:cNvSpPr>
+          <p:nvPr>
+            <p:ph idx="1"/>
+          </p:nvPr>
+        </p:nvSpPr>
+        <p:spPr/>
+        <p:txBody>
+          <a:bodyPr/>
+          <a:p>
+            <a:r>
+              <a:rPr lang="en-US" altLang="zh-CN"/>
+              <a:t>References</a:t>
+            </a:r>
+            <a:endParaRPr lang="en-US" altLang="zh-CN"/>
+          </a:p>
+          <a:p>
+            <a:pPr lvl="1"/>
+            <a:r>
+              <a:rPr lang="en-US" altLang="zh-CN"/>
+              <a:t>https://www.freecodecamp.org/news/requiring-modules-in-node-js-everything-you-need-to-know-e7fbd119be8</a:t>
+            </a:r>
+            <a:endParaRPr lang="en-US" altLang="zh-CN"/>
+          </a:p>
+          <a:p>
+            <a:pPr lvl="0"/>
+            <a:r>
+              <a:rPr lang="en-US" altLang="zh-CN"/>
+              <a:t>require(‘module’)</a:t>
+            </a:r>
+            <a:endParaRPr lang="en-US" altLang="zh-CN"/>
+          </a:p>
+          <a:p>
+            <a:pPr lvl="1"/>
+            <a:r>
+              <a:rPr lang="en-US" altLang="zh-CN"/>
+              <a:t>steps: resolving, loading, wrapping, evaluating, caching</a:t>
+            </a:r>
+            <a:endParaRPr lang="en-US" altLang="zh-CN"/>
+          </a:p>
+          <a:p>
+            <a:pPr lvl="1"/>
+            <a:r>
+              <a:rPr lang="en-US" altLang="zh-CN"/>
+              <a:t>resolving</a:t>
+            </a:r>
+            <a:endParaRPr lang="en-US" altLang="zh-CN"/>
+          </a:p>
+          <a:p>
+            <a:pPr lvl="2"/>
+            <a:r>
+              <a:rPr lang="en-US" altLang="zh-CN"/>
+              <a:t>module.paths</a:t>
+            </a:r>
+            <a:endParaRPr lang="en-US" altLang="zh-CN"/>
+          </a:p>
+          <a:p>
+            <a:pPr lvl="2"/>
+            <a:r>
+              <a:rPr lang="en-US" altLang="zh-CN"/>
+              <a:t>index.js is used by default if require a folder</a:t>
+            </a:r>
+            <a:endParaRPr lang="en-US" altLang="zh-CN"/>
+          </a:p>
+          <a:p>
+            <a:pPr lvl="2"/>
+            <a:r>
+              <a:rPr lang="en-US" altLang="zh-CN"/>
+              <a:t>main property in package.json is used if require a folder</a:t>
+            </a:r>
+            <a:endParaRPr lang="en-US" altLang="zh-CN"/>
+          </a:p>
+          <a:p>
+            <a:pPr lvl="1"/>
+            <a:r>
+              <a:rPr lang="en-US" altLang="zh-CN"/>
+              <a:t>require.resolve</a:t>
+            </a:r>
+            <a:endParaRPr lang="en-US" altLang="zh-CN"/>
+          </a:p>
+          <a:p>
+            <a:pPr lvl="2"/>
+            <a:r>
+              <a:rPr lang="en-US" altLang="zh-CN"/>
+              <a:t>Only resolving, no other steps</a:t>
+            </a:r>
+            <a:endParaRPr lang="en-US" altLang="zh-CN"/>
+          </a:p>
+        </p:txBody>
+      </p:sp>
+    </p:spTree>
+    <p:custDataLst>
+      <p:tags r:id="rId1"/>
+    </p:custDataLst>
+  </p:cSld>
+  <p:clrMapOvr>
+    <a:masterClrMapping/>
+  </p:clrMapOvr>
+</p:sld>
+</file>
+
+<file path=ppt/slides/slide19.xml><?xml version="1.0" encoding="utf-8"?>
 <p:sld xmlns:a="http://schemas.openxmlformats.org/drawingml/2006/main" xmlns:r="http://schemas.openxmlformats.org/officeDocument/2006/relationships" xmlns:p="http://schemas.openxmlformats.org/presentationml/2006/main">
   <p:cSld>
     <p:spTree>
@@ -5458,352 +5788,6 @@
     </p:spTree>
     <p:custDataLst>
       <p:tags r:id="rId2"/>
-    </p:custDataLst>
-  </p:cSld>
-  <p:clrMapOvr>
-    <a:masterClrMapping/>
-  </p:clrMapOvr>
-</p:sld>
-</file>
-
-<file path=ppt/slides/slide18.xml><?xml version="1.0" encoding="utf-8"?>
-<p:sld xmlns:a="http://schemas.openxmlformats.org/drawingml/2006/main" xmlns:r="http://schemas.openxmlformats.org/officeDocument/2006/relationships" xmlns:p="http://schemas.openxmlformats.org/presentationml/2006/main">
-  <p:cSld>
-    <p:spTree>
-      <p:nvGrpSpPr>
-        <p:cNvPr id="1" name=""/>
-        <p:cNvGrpSpPr/>
-        <p:nvPr/>
-      </p:nvGrpSpPr>
-      <p:grpSpPr/>
-      <p:sp>
-        <p:nvSpPr>
-          <p:cNvPr id="2" name="标题 1"/>
-          <p:cNvSpPr>
-            <a:spLocks noGrp="1"/>
-          </p:cNvSpPr>
-          <p:nvPr>
-            <p:ph type="title"/>
-          </p:nvPr>
-        </p:nvSpPr>
-        <p:spPr/>
-        <p:txBody>
-          <a:bodyPr/>
-          <a:p>
-            <a:r>
-              <a:rPr lang="en-US" altLang="zh-CN"/>
-              <a:t>Debug</a:t>
-            </a:r>
-            <a:endParaRPr lang="en-US" altLang="zh-CN"/>
-          </a:p>
-        </p:txBody>
-      </p:sp>
-      <p:sp>
-        <p:nvSpPr>
-          <p:cNvPr id="3" name="内容占位符 2"/>
-          <p:cNvSpPr>
-            <a:spLocks noGrp="1"/>
-          </p:cNvSpPr>
-          <p:nvPr>
-            <p:ph idx="1"/>
-          </p:nvPr>
-        </p:nvSpPr>
-        <p:spPr/>
-        <p:txBody>
-          <a:bodyPr/>
-          <a:p>
-            <a:r>
-              <a:rPr lang="zh-CN" altLang="en-US"/>
-              <a:t>set DEBUG=*,-not_this</a:t>
-            </a:r>
-            <a:endParaRPr lang="zh-CN" altLang="en-US"/>
-          </a:p>
-          <a:p>
-            <a:pPr lvl="1"/>
-            <a:r>
-              <a:rPr lang="en-US" altLang="zh-CN"/>
-              <a:t>set DEBUG= to turn off debug output</a:t>
-            </a:r>
-            <a:endParaRPr lang="en-US" altLang="zh-CN"/>
-          </a:p>
-        </p:txBody>
-      </p:sp>
-    </p:spTree>
-    <p:custDataLst>
-      <p:tags r:id="rId1"/>
-    </p:custDataLst>
-  </p:cSld>
-  <p:clrMapOvr>
-    <a:masterClrMapping/>
-  </p:clrMapOvr>
-</p:sld>
-</file>
-
-<file path=ppt/slides/slide19.xml><?xml version="1.0" encoding="utf-8"?>
-<p:sld xmlns:a="http://schemas.openxmlformats.org/drawingml/2006/main" xmlns:r="http://schemas.openxmlformats.org/officeDocument/2006/relationships" xmlns:p="http://schemas.openxmlformats.org/presentationml/2006/main">
-  <p:cSld>
-    <p:spTree>
-      <p:nvGrpSpPr>
-        <p:cNvPr id="1" name=""/>
-        <p:cNvGrpSpPr/>
-        <p:nvPr/>
-      </p:nvGrpSpPr>
-      <p:grpSpPr/>
-      <p:sp>
-        <p:nvSpPr>
-          <p:cNvPr id="2" name="标题 1"/>
-          <p:cNvSpPr>
-            <a:spLocks noGrp="1"/>
-          </p:cNvSpPr>
-          <p:nvPr>
-            <p:ph type="title"/>
-          </p:nvPr>
-        </p:nvSpPr>
-        <p:spPr/>
-        <p:txBody>
-          <a:bodyPr/>
-          <a:p>
-            <a:r>
-              <a:rPr lang="en-US" altLang="zh-CN"/>
-              <a:t>Printer - printer module</a:t>
-            </a:r>
-            <a:endParaRPr lang="en-US" altLang="zh-CN"/>
-          </a:p>
-        </p:txBody>
-      </p:sp>
-      <p:sp>
-        <p:nvSpPr>
-          <p:cNvPr id="3" name="内容占位符 2"/>
-          <p:cNvSpPr>
-            <a:spLocks noGrp="1"/>
-          </p:cNvSpPr>
-          <p:nvPr>
-            <p:ph idx="1"/>
-          </p:nvPr>
-        </p:nvSpPr>
-        <p:spPr>
-          <a:xfrm>
-            <a:off x="838200" y="1211580"/>
-            <a:ext cx="5257800" cy="4549140"/>
-          </a:xfrm>
-        </p:spPr>
-        <p:txBody>
-          <a:bodyPr>
-            <a:normAutofit lnSpcReduction="10000"/>
-          </a:bodyPr>
-          <a:p>
-            <a:pPr lvl="0"/>
-            <a:r>
-              <a:rPr lang="en-US" altLang="zh-CN" sz="2000">
-                <a:sym typeface="+mn-ea"/>
-              </a:rPr>
-              <a:t>Install</a:t>
-            </a:r>
-            <a:endParaRPr lang="en-US" altLang="zh-CN" sz="2000"/>
-          </a:p>
-          <a:p>
-            <a:pPr lvl="1"/>
-            <a:r>
-              <a:rPr lang="en-US" altLang="zh-CN" sz="2000">
-                <a:sym typeface="+mn-ea"/>
-              </a:rPr>
-              <a:t>npm install printer --legacy-peer-deps</a:t>
-            </a:r>
-            <a:endParaRPr lang="en-US" altLang="zh-CN" sz="2000"/>
-          </a:p>
-          <a:p>
-            <a:pPr lvl="1"/>
-            <a:r>
-              <a:rPr lang="en-US" altLang="zh-CN" sz="2000"/>
-              <a:t>sudo npm i -g node-gyp</a:t>
-            </a:r>
-            <a:endParaRPr lang="en-US" altLang="zh-CN" sz="2000"/>
-          </a:p>
-          <a:p>
-            <a:pPr lvl="1"/>
-            <a:r>
-              <a:rPr lang="en-US" altLang="zh-CN" sz="2000"/>
-              <a:t>sudo apt install -y libcups2-dev</a:t>
-            </a:r>
-            <a:endParaRPr lang="en-US" altLang="zh-CN" sz="2000"/>
-          </a:p>
-          <a:p>
-            <a:pPr lvl="1"/>
-            <a:r>
-              <a:rPr lang="en-US" altLang="zh-CN" sz="2000"/>
-              <a:t>npm i -D electron-rebuild</a:t>
-            </a:r>
-            <a:endParaRPr lang="en-US" altLang="zh-CN" sz="2000"/>
-          </a:p>
-          <a:p>
-            <a:pPr lvl="1"/>
-            <a:r>
-              <a:rPr lang="en-US" altLang="zh-CN">
-                <a:sym typeface="+mn-ea"/>
-              </a:rPr>
-              <a:t>cd node_modules/printer &amp;&amp; </a:t>
-            </a:r>
-            <a:r>
-              <a:rPr lang="en-US" altLang="zh-CN" sz="2000">
-                <a:sym typeface="+mn-ea"/>
-              </a:rPr>
-              <a:t>node-gyp rebuild --arch=arm64 &amp;&amp; cd ../..</a:t>
-            </a:r>
-            <a:endParaRPr lang="en-US" altLang="zh-CN" sz="2000">
-              <a:sym typeface="+mn-ea"/>
-            </a:endParaRPr>
-          </a:p>
-          <a:p>
-            <a:pPr lvl="1"/>
-            <a:r>
-              <a:rPr lang="en-US" altLang="zh-CN" sz="2000"/>
-              <a:t>node_modules/.bin/electron-rebuild</a:t>
-            </a:r>
-            <a:endParaRPr lang="en-US" altLang="zh-CN" sz="2000"/>
-          </a:p>
-          <a:p>
-            <a:pPr lvl="0"/>
-            <a:r>
-              <a:rPr lang="en-US" altLang="zh-CN"/>
-              <a:t>Usage</a:t>
-            </a:r>
-            <a:endParaRPr lang="en-US" altLang="zh-CN"/>
-          </a:p>
-          <a:p>
-            <a:pPr lvl="1"/>
-            <a:r>
-              <a:rPr lang="en-US" altLang="zh-CN"/>
-              <a:t>const printer = require('printer')</a:t>
-            </a:r>
-            <a:endParaRPr lang="en-US" altLang="zh-CN"/>
-          </a:p>
-          <a:p>
-            <a:pPr lvl="1"/>
-            <a:r>
-              <a:rPr lang="en-US" altLang="zh-CN"/>
-              <a:t>printer.getPrinters()</a:t>
-            </a:r>
-            <a:endParaRPr lang="en-US" altLang="zh-CN"/>
-          </a:p>
-          <a:p>
-            <a:pPr lvl="1"/>
-            <a:r>
-              <a:rPr lang="en-US" altLang="zh-CN"/>
-              <a:t>printer.printDirect(options)</a:t>
-            </a:r>
-            <a:endParaRPr lang="en-US" altLang="zh-CN"/>
-          </a:p>
-          <a:p>
-            <a:pPr lvl="1"/>
-            <a:r>
-              <a:rPr lang="en-US" altLang="zh-CN"/>
-              <a:t>printer.printFile(options)</a:t>
-            </a:r>
-            <a:endParaRPr lang="en-US" altLang="zh-CN"/>
-          </a:p>
-          <a:p>
-            <a:pPr lvl="1"/>
-            <a:r>
-              <a:rPr lang="en-US" altLang="zh-CN"/>
-              <a:t>printer.getSupportedPrintFormats()</a:t>
-            </a:r>
-            <a:endParaRPr lang="en-US" altLang="zh-CN"/>
-          </a:p>
-        </p:txBody>
-      </p:sp>
-      <p:sp>
-        <p:nvSpPr>
-          <p:cNvPr id="4" name="文本框 3"/>
-          <p:cNvSpPr txBox="1"/>
-          <p:nvPr/>
-        </p:nvSpPr>
-        <p:spPr>
-          <a:xfrm>
-            <a:off x="6880225" y="1483995"/>
-            <a:ext cx="4502150" cy="3138170"/>
-          </a:xfrm>
-          <a:prstGeom prst="rect">
-            <a:avLst/>
-          </a:prstGeom>
-          <a:noFill/>
-          <a:ln>
-            <a:solidFill>
-              <a:srgbClr val="C00000"/>
-            </a:solidFill>
-          </a:ln>
-        </p:spPr>
-        <p:txBody>
-          <a:bodyPr wrap="square" rtlCol="0">
-            <a:spAutoFit/>
-          </a:bodyPr>
-          <a:p>
-            <a:r>
-              <a:rPr lang="zh-CN" altLang="en-US"/>
-              <a:t>printer.printFile({filename:filename,</a:t>
-            </a:r>
-            <a:endParaRPr lang="zh-CN" altLang="en-US"/>
-          </a:p>
-          <a:p>
-            <a:r>
-              <a:rPr lang="zh-CN" altLang="en-US"/>
-              <a:t>    printer: process.env[3], // printer name, if missing then will print to default printer</a:t>
-            </a:r>
-            <a:endParaRPr lang="zh-CN" altLang="en-US"/>
-          </a:p>
-          <a:p>
-            <a:r>
-              <a:rPr lang="zh-CN" altLang="en-US"/>
-              <a:t>    success:function(jobID){</a:t>
-            </a:r>
-            <a:endParaRPr lang="zh-CN" altLang="en-US"/>
-          </a:p>
-          <a:p>
-            <a:r>
-              <a:rPr lang="zh-CN" altLang="en-US"/>
-              <a:t>      console.log("sent to printer with ID: "+jobID);</a:t>
-            </a:r>
-            <a:endParaRPr lang="zh-CN" altLang="en-US"/>
-          </a:p>
-          <a:p>
-            <a:r>
-              <a:rPr lang="zh-CN" altLang="en-US"/>
-              <a:t>    },</a:t>
-            </a:r>
-            <a:endParaRPr lang="zh-CN" altLang="en-US"/>
-          </a:p>
-          <a:p>
-            <a:r>
-              <a:rPr lang="zh-CN" altLang="en-US"/>
-              <a:t>    error:function(err){</a:t>
-            </a:r>
-            <a:endParaRPr lang="zh-CN" altLang="en-US"/>
-          </a:p>
-          <a:p>
-            <a:r>
-              <a:rPr lang="zh-CN" altLang="en-US"/>
-              <a:t>      console.log(err);</a:t>
-            </a:r>
-            <a:endParaRPr lang="zh-CN" altLang="en-US"/>
-          </a:p>
-          <a:p>
-            <a:r>
-              <a:rPr lang="zh-CN" altLang="en-US"/>
-              <a:t>    }</a:t>
-            </a:r>
-            <a:endParaRPr lang="zh-CN" altLang="en-US"/>
-          </a:p>
-          <a:p>
-            <a:r>
-              <a:rPr lang="zh-CN" altLang="en-US"/>
-              <a:t>  });</a:t>
-            </a:r>
-            <a:endParaRPr lang="zh-CN" altLang="en-US"/>
-          </a:p>
-        </p:txBody>
-      </p:sp>
-    </p:spTree>
-    <p:custDataLst>
-      <p:tags r:id="rId1"/>
     </p:custDataLst>
   </p:cSld>
   <p:clrMapOvr>
@@ -6062,6 +6046,352 @@
           <a:p>
             <a:r>
               <a:rPr lang="en-US" altLang="zh-CN"/>
+              <a:t>Debug</a:t>
+            </a:r>
+            <a:endParaRPr lang="en-US" altLang="zh-CN"/>
+          </a:p>
+        </p:txBody>
+      </p:sp>
+      <p:sp>
+        <p:nvSpPr>
+          <p:cNvPr id="3" name="内容占位符 2"/>
+          <p:cNvSpPr>
+            <a:spLocks noGrp="1"/>
+          </p:cNvSpPr>
+          <p:nvPr>
+            <p:ph idx="1"/>
+          </p:nvPr>
+        </p:nvSpPr>
+        <p:spPr/>
+        <p:txBody>
+          <a:bodyPr/>
+          <a:p>
+            <a:r>
+              <a:rPr lang="zh-CN" altLang="en-US"/>
+              <a:t>set DEBUG=*,-not_this</a:t>
+            </a:r>
+            <a:endParaRPr lang="zh-CN" altLang="en-US"/>
+          </a:p>
+          <a:p>
+            <a:pPr lvl="1"/>
+            <a:r>
+              <a:rPr lang="en-US" altLang="zh-CN"/>
+              <a:t>set DEBUG= to turn off debug output</a:t>
+            </a:r>
+            <a:endParaRPr lang="en-US" altLang="zh-CN"/>
+          </a:p>
+        </p:txBody>
+      </p:sp>
+    </p:spTree>
+    <p:custDataLst>
+      <p:tags r:id="rId1"/>
+    </p:custDataLst>
+  </p:cSld>
+  <p:clrMapOvr>
+    <a:masterClrMapping/>
+  </p:clrMapOvr>
+</p:sld>
+</file>
+
+<file path=ppt/slides/slide21.xml><?xml version="1.0" encoding="utf-8"?>
+<p:sld xmlns:a="http://schemas.openxmlformats.org/drawingml/2006/main" xmlns:r="http://schemas.openxmlformats.org/officeDocument/2006/relationships" xmlns:p="http://schemas.openxmlformats.org/presentationml/2006/main">
+  <p:cSld>
+    <p:spTree>
+      <p:nvGrpSpPr>
+        <p:cNvPr id="1" name=""/>
+        <p:cNvGrpSpPr/>
+        <p:nvPr/>
+      </p:nvGrpSpPr>
+      <p:grpSpPr/>
+      <p:sp>
+        <p:nvSpPr>
+          <p:cNvPr id="2" name="标题 1"/>
+          <p:cNvSpPr>
+            <a:spLocks noGrp="1"/>
+          </p:cNvSpPr>
+          <p:nvPr>
+            <p:ph type="title"/>
+          </p:nvPr>
+        </p:nvSpPr>
+        <p:spPr/>
+        <p:txBody>
+          <a:bodyPr/>
+          <a:p>
+            <a:r>
+              <a:rPr lang="en-US" altLang="zh-CN"/>
+              <a:t>Printer - printer module</a:t>
+            </a:r>
+            <a:endParaRPr lang="en-US" altLang="zh-CN"/>
+          </a:p>
+        </p:txBody>
+      </p:sp>
+      <p:sp>
+        <p:nvSpPr>
+          <p:cNvPr id="3" name="内容占位符 2"/>
+          <p:cNvSpPr>
+            <a:spLocks noGrp="1"/>
+          </p:cNvSpPr>
+          <p:nvPr>
+            <p:ph idx="1"/>
+          </p:nvPr>
+        </p:nvSpPr>
+        <p:spPr>
+          <a:xfrm>
+            <a:off x="838200" y="1211580"/>
+            <a:ext cx="5257800" cy="4549140"/>
+          </a:xfrm>
+        </p:spPr>
+        <p:txBody>
+          <a:bodyPr>
+            <a:normAutofit lnSpcReduction="10000"/>
+          </a:bodyPr>
+          <a:p>
+            <a:pPr lvl="0"/>
+            <a:r>
+              <a:rPr lang="en-US" altLang="zh-CN" sz="2000">
+                <a:sym typeface="+mn-ea"/>
+              </a:rPr>
+              <a:t>Install</a:t>
+            </a:r>
+            <a:endParaRPr lang="en-US" altLang="zh-CN" sz="2000"/>
+          </a:p>
+          <a:p>
+            <a:pPr lvl="1"/>
+            <a:r>
+              <a:rPr lang="en-US" altLang="zh-CN" sz="2000">
+                <a:sym typeface="+mn-ea"/>
+              </a:rPr>
+              <a:t>npm install printer --legacy-peer-deps</a:t>
+            </a:r>
+            <a:endParaRPr lang="en-US" altLang="zh-CN" sz="2000"/>
+          </a:p>
+          <a:p>
+            <a:pPr lvl="1"/>
+            <a:r>
+              <a:rPr lang="en-US" altLang="zh-CN" sz="2000"/>
+              <a:t>sudo npm i -g node-gyp</a:t>
+            </a:r>
+            <a:endParaRPr lang="en-US" altLang="zh-CN" sz="2000"/>
+          </a:p>
+          <a:p>
+            <a:pPr lvl="1"/>
+            <a:r>
+              <a:rPr lang="en-US" altLang="zh-CN" sz="2000"/>
+              <a:t>sudo apt install -y libcups2-dev</a:t>
+            </a:r>
+            <a:endParaRPr lang="en-US" altLang="zh-CN" sz="2000"/>
+          </a:p>
+          <a:p>
+            <a:pPr lvl="1"/>
+            <a:r>
+              <a:rPr lang="en-US" altLang="zh-CN" sz="2000"/>
+              <a:t>npm i -D electron-rebuild</a:t>
+            </a:r>
+            <a:endParaRPr lang="en-US" altLang="zh-CN" sz="2000"/>
+          </a:p>
+          <a:p>
+            <a:pPr lvl="1"/>
+            <a:r>
+              <a:rPr lang="en-US" altLang="zh-CN">
+                <a:sym typeface="+mn-ea"/>
+              </a:rPr>
+              <a:t>cd node_modules/printer &amp;&amp; </a:t>
+            </a:r>
+            <a:r>
+              <a:rPr lang="en-US" altLang="zh-CN" sz="2000">
+                <a:sym typeface="+mn-ea"/>
+              </a:rPr>
+              <a:t>node-gyp rebuild --arch=arm64 &amp;&amp; cd ../..</a:t>
+            </a:r>
+            <a:endParaRPr lang="en-US" altLang="zh-CN" sz="2000">
+              <a:sym typeface="+mn-ea"/>
+            </a:endParaRPr>
+          </a:p>
+          <a:p>
+            <a:pPr lvl="1"/>
+            <a:r>
+              <a:rPr lang="en-US" altLang="zh-CN" sz="2000"/>
+              <a:t>node_modules/.bin/electron-rebuild</a:t>
+            </a:r>
+            <a:endParaRPr lang="en-US" altLang="zh-CN" sz="2000"/>
+          </a:p>
+          <a:p>
+            <a:pPr lvl="0"/>
+            <a:r>
+              <a:rPr lang="en-US" altLang="zh-CN"/>
+              <a:t>Usage</a:t>
+            </a:r>
+            <a:endParaRPr lang="en-US" altLang="zh-CN"/>
+          </a:p>
+          <a:p>
+            <a:pPr lvl="1"/>
+            <a:r>
+              <a:rPr lang="en-US" altLang="zh-CN"/>
+              <a:t>const printer = require('printer')</a:t>
+            </a:r>
+            <a:endParaRPr lang="en-US" altLang="zh-CN"/>
+          </a:p>
+          <a:p>
+            <a:pPr lvl="1"/>
+            <a:r>
+              <a:rPr lang="en-US" altLang="zh-CN"/>
+              <a:t>printer.getPrinters()</a:t>
+            </a:r>
+            <a:endParaRPr lang="en-US" altLang="zh-CN"/>
+          </a:p>
+          <a:p>
+            <a:pPr lvl="1"/>
+            <a:r>
+              <a:rPr lang="en-US" altLang="zh-CN"/>
+              <a:t>printer.printDirect(options)</a:t>
+            </a:r>
+            <a:endParaRPr lang="en-US" altLang="zh-CN"/>
+          </a:p>
+          <a:p>
+            <a:pPr lvl="1"/>
+            <a:r>
+              <a:rPr lang="en-US" altLang="zh-CN"/>
+              <a:t>printer.printFile(options)</a:t>
+            </a:r>
+            <a:endParaRPr lang="en-US" altLang="zh-CN"/>
+          </a:p>
+          <a:p>
+            <a:pPr lvl="1"/>
+            <a:r>
+              <a:rPr lang="en-US" altLang="zh-CN"/>
+              <a:t>printer.getSupportedPrintFormats()</a:t>
+            </a:r>
+            <a:endParaRPr lang="en-US" altLang="zh-CN"/>
+          </a:p>
+        </p:txBody>
+      </p:sp>
+      <p:sp>
+        <p:nvSpPr>
+          <p:cNvPr id="4" name="文本框 3"/>
+          <p:cNvSpPr txBox="1"/>
+          <p:nvPr/>
+        </p:nvSpPr>
+        <p:spPr>
+          <a:xfrm>
+            <a:off x="6880225" y="1483995"/>
+            <a:ext cx="4502150" cy="3138170"/>
+          </a:xfrm>
+          <a:prstGeom prst="rect">
+            <a:avLst/>
+          </a:prstGeom>
+          <a:noFill/>
+          <a:ln>
+            <a:solidFill>
+              <a:srgbClr val="C00000"/>
+            </a:solidFill>
+          </a:ln>
+        </p:spPr>
+        <p:txBody>
+          <a:bodyPr wrap="square" rtlCol="0">
+            <a:spAutoFit/>
+          </a:bodyPr>
+          <a:p>
+            <a:r>
+              <a:rPr lang="zh-CN" altLang="en-US"/>
+              <a:t>printer.printFile({filename:filename,</a:t>
+            </a:r>
+            <a:endParaRPr lang="zh-CN" altLang="en-US"/>
+          </a:p>
+          <a:p>
+            <a:r>
+              <a:rPr lang="zh-CN" altLang="en-US"/>
+              <a:t>    printer: process.env[3], // printer name, if missing then will print to default printer</a:t>
+            </a:r>
+            <a:endParaRPr lang="zh-CN" altLang="en-US"/>
+          </a:p>
+          <a:p>
+            <a:r>
+              <a:rPr lang="zh-CN" altLang="en-US"/>
+              <a:t>    success:function(jobID){</a:t>
+            </a:r>
+            <a:endParaRPr lang="zh-CN" altLang="en-US"/>
+          </a:p>
+          <a:p>
+            <a:r>
+              <a:rPr lang="zh-CN" altLang="en-US"/>
+              <a:t>      console.log("sent to printer with ID: "+jobID);</a:t>
+            </a:r>
+            <a:endParaRPr lang="zh-CN" altLang="en-US"/>
+          </a:p>
+          <a:p>
+            <a:r>
+              <a:rPr lang="zh-CN" altLang="en-US"/>
+              <a:t>    },</a:t>
+            </a:r>
+            <a:endParaRPr lang="zh-CN" altLang="en-US"/>
+          </a:p>
+          <a:p>
+            <a:r>
+              <a:rPr lang="zh-CN" altLang="en-US"/>
+              <a:t>    error:function(err){</a:t>
+            </a:r>
+            <a:endParaRPr lang="zh-CN" altLang="en-US"/>
+          </a:p>
+          <a:p>
+            <a:r>
+              <a:rPr lang="zh-CN" altLang="en-US"/>
+              <a:t>      console.log(err);</a:t>
+            </a:r>
+            <a:endParaRPr lang="zh-CN" altLang="en-US"/>
+          </a:p>
+          <a:p>
+            <a:r>
+              <a:rPr lang="zh-CN" altLang="en-US"/>
+              <a:t>    }</a:t>
+            </a:r>
+            <a:endParaRPr lang="zh-CN" altLang="en-US"/>
+          </a:p>
+          <a:p>
+            <a:r>
+              <a:rPr lang="zh-CN" altLang="en-US"/>
+              <a:t>  });</a:t>
+            </a:r>
+            <a:endParaRPr lang="zh-CN" altLang="en-US"/>
+          </a:p>
+        </p:txBody>
+      </p:sp>
+    </p:spTree>
+    <p:custDataLst>
+      <p:tags r:id="rId1"/>
+    </p:custDataLst>
+  </p:cSld>
+  <p:clrMapOvr>
+    <a:masterClrMapping/>
+  </p:clrMapOvr>
+</p:sld>
+</file>
+
+<file path=ppt/slides/slide22.xml><?xml version="1.0" encoding="utf-8"?>
+<p:sld xmlns:a="http://schemas.openxmlformats.org/drawingml/2006/main" xmlns:r="http://schemas.openxmlformats.org/officeDocument/2006/relationships" xmlns:p="http://schemas.openxmlformats.org/presentationml/2006/main">
+  <p:cSld>
+    <p:spTree>
+      <p:nvGrpSpPr>
+        <p:cNvPr id="1" name=""/>
+        <p:cNvGrpSpPr/>
+        <p:nvPr/>
+      </p:nvGrpSpPr>
+      <p:grpSpPr/>
+      <p:sp>
+        <p:nvSpPr>
+          <p:cNvPr id="2" name="标题 1"/>
+          <p:cNvSpPr>
+            <a:spLocks noGrp="1"/>
+          </p:cNvSpPr>
+          <p:nvPr>
+            <p:ph type="title"/>
+          </p:nvPr>
+        </p:nvSpPr>
+        <p:spPr/>
+        <p:txBody>
+          <a:bodyPr/>
+          <a:p>
+            <a:r>
+              <a:rPr lang="en-US" altLang="zh-CN"/>
               <a:t>Printing</a:t>
             </a:r>
             <a:endParaRPr lang="en-US" altLang="zh-CN"/>
@@ -6391,7 +6721,7 @@
 </p:sld>
 </file>
 
-<file path=ppt/slides/slide21.xml><?xml version="1.0" encoding="utf-8"?>
+<file path=ppt/slides/slide23.xml><?xml version="1.0" encoding="utf-8"?>
 <p:sld xmlns:a="http://schemas.openxmlformats.org/drawingml/2006/main" xmlns:r="http://schemas.openxmlformats.org/officeDocument/2006/relationships" xmlns:p="http://schemas.openxmlformats.org/presentationml/2006/main">
   <p:cSld>
     <p:spTree>
@@ -6655,7 +6985,7 @@
 </p:sld>
 </file>
 
-<file path=ppt/slides/slide22.xml><?xml version="1.0" encoding="utf-8"?>
+<file path=ppt/slides/slide24.xml><?xml version="1.0" encoding="utf-8"?>
 <p:sld xmlns:a="http://schemas.openxmlformats.org/drawingml/2006/main" xmlns:r="http://schemas.openxmlformats.org/officeDocument/2006/relationships" xmlns:p="http://schemas.openxmlformats.org/presentationml/2006/main">
   <p:cSld>
     <p:spTree>
@@ -6745,6 +7075,92 @@
 </file>
 
 <file path=ppt/slides/slide3.xml><?xml version="1.0" encoding="utf-8"?>
+<p:sld xmlns:a="http://schemas.openxmlformats.org/drawingml/2006/main" xmlns:r="http://schemas.openxmlformats.org/officeDocument/2006/relationships" xmlns:p="http://schemas.openxmlformats.org/presentationml/2006/main">
+  <p:cSld>
+    <p:spTree>
+      <p:nvGrpSpPr>
+        <p:cNvPr id="1" name=""/>
+        <p:cNvGrpSpPr/>
+        <p:nvPr/>
+      </p:nvGrpSpPr>
+      <p:grpSpPr/>
+      <p:sp>
+        <p:nvSpPr>
+          <p:cNvPr id="2" name="标题 1"/>
+          <p:cNvSpPr>
+            <a:spLocks noGrp="1"/>
+          </p:cNvSpPr>
+          <p:nvPr>
+            <p:ph type="title"/>
+          </p:nvPr>
+        </p:nvSpPr>
+        <p:spPr/>
+        <p:txBody>
+          <a:bodyPr/>
+          <a:p>
+            <a:r>
+              <a:rPr lang="en-US" altLang="zh-CN"/>
+              <a:t>Versions</a:t>
+            </a:r>
+            <a:endParaRPr lang="en-US" altLang="zh-CN"/>
+          </a:p>
+        </p:txBody>
+      </p:sp>
+      <p:sp>
+        <p:nvSpPr>
+          <p:cNvPr id="3" name="内容占位符 2"/>
+          <p:cNvSpPr>
+            <a:spLocks noGrp="1"/>
+          </p:cNvSpPr>
+          <p:nvPr>
+            <p:ph idx="1"/>
+          </p:nvPr>
+        </p:nvSpPr>
+        <p:spPr>
+          <a:xfrm>
+            <a:off x="838200" y="1211580"/>
+            <a:ext cx="6578600" cy="4549140"/>
+          </a:xfrm>
+        </p:spPr>
+        <p:txBody>
+          <a:bodyPr/>
+          <a:p>
+            <a:r>
+              <a:rPr lang="en-US" altLang="zh-CN"/>
+              <a:t>v16</a:t>
+            </a:r>
+            <a:endParaRPr lang="en-US" altLang="zh-CN"/>
+          </a:p>
+          <a:p>
+            <a:pPr lvl="1"/>
+            <a:r>
+              <a:rPr lang="en-US" altLang="zh-CN"/>
+              <a:t>Node.js 16+ headers assume C++11/14 features like std::remove_cv_t (which requires GCC ≥ 5)</a:t>
+            </a:r>
+            <a:endParaRPr lang="en-US" altLang="zh-CN"/>
+          </a:p>
+          <a:p>
+            <a:pPr lvl="2"/>
+            <a:r>
+              <a:rPr lang="en-US" altLang="zh-CN"/>
+              <a:t>gcc --version</a:t>
+            </a:r>
+            <a:endParaRPr lang="en-US" altLang="zh-CN"/>
+          </a:p>
+        </p:txBody>
+      </p:sp>
+    </p:spTree>
+    <p:custDataLst>
+      <p:tags r:id="rId1"/>
+    </p:custDataLst>
+  </p:cSld>
+  <p:clrMapOvr>
+    <a:masterClrMapping/>
+  </p:clrMapOvr>
+</p:sld>
+</file>
+
+<file path=ppt/slides/slide4.xml><?xml version="1.0" encoding="utf-8"?>
 <p:sld xmlns:a="http://schemas.openxmlformats.org/drawingml/2006/main" xmlns:r="http://schemas.openxmlformats.org/officeDocument/2006/relationships" xmlns:p="http://schemas.openxmlformats.org/presentationml/2006/main">
   <p:cSld>
     <p:spTree>
@@ -6913,7 +7329,7 @@
 </p:sld>
 </file>
 
-<file path=ppt/slides/slide4.xml><?xml version="1.0" encoding="utf-8"?>
+<file path=ppt/slides/slide5.xml><?xml version="1.0" encoding="utf-8"?>
 <p:sld xmlns:a="http://schemas.openxmlformats.org/drawingml/2006/main" xmlns:r="http://schemas.openxmlformats.org/officeDocument/2006/relationships" xmlns:p="http://schemas.openxmlformats.org/presentationml/2006/main">
   <p:cSld>
     <p:spTree>
@@ -7159,7 +7575,7 @@
 </p:sld>
 </file>
 
-<file path=ppt/slides/slide5.xml><?xml version="1.0" encoding="utf-8"?>
+<file path=ppt/slides/slide6.xml><?xml version="1.0" encoding="utf-8"?>
 <p:sld xmlns:a="http://schemas.openxmlformats.org/drawingml/2006/main" xmlns:r="http://schemas.openxmlformats.org/officeDocument/2006/relationships" xmlns:p="http://schemas.openxmlformats.org/presentationml/2006/main">
   <p:cSld>
     <p:spTree>
@@ -7879,7 +8295,7 @@
 </p:sld>
 </file>
 
-<file path=ppt/slides/slide6.xml><?xml version="1.0" encoding="utf-8"?>
+<file path=ppt/slides/slide7.xml><?xml version="1.0" encoding="utf-8"?>
 <p:sld xmlns:a="http://schemas.openxmlformats.org/drawingml/2006/main" xmlns:r="http://schemas.openxmlformats.org/officeDocument/2006/relationships" xmlns:p="http://schemas.openxmlformats.org/presentationml/2006/main">
   <p:cSld>
     <p:spTree>
@@ -8032,7 +8448,7 @@
 </p:sld>
 </file>
 
-<file path=ppt/slides/slide7.xml><?xml version="1.0" encoding="utf-8"?>
+<file path=ppt/slides/slide8.xml><?xml version="1.0" encoding="utf-8"?>
 <p:sld xmlns:a="http://schemas.openxmlformats.org/drawingml/2006/main" xmlns:r="http://schemas.openxmlformats.org/officeDocument/2006/relationships" xmlns:p="http://schemas.openxmlformats.org/presentationml/2006/main">
   <p:cSld>
     <p:spTree>
@@ -8187,7 +8603,7 @@
 </p:sld>
 </file>
 
-<file path=ppt/slides/slide8.xml><?xml version="1.0" encoding="utf-8"?>
+<file path=ppt/slides/slide9.xml><?xml version="1.0" encoding="utf-8"?>
 <p:sld xmlns:a="http://schemas.openxmlformats.org/drawingml/2006/main" xmlns:r="http://schemas.openxmlformats.org/officeDocument/2006/relationships" xmlns:p="http://schemas.openxmlformats.org/presentationml/2006/main">
   <p:cSld>
     <p:spTree>
@@ -8722,12 +9138,12 @@
                         <a:buNone/>
                       </a:pPr>
                       <a:r>
-                        <a:rPr lang="en-US" altLang="zh-CN" sz="1200">
+                        <a:rPr lang="en-US" altLang="zh-CN" sz="1200" b="1">
                           <a:sym typeface="+mn-ea"/>
                         </a:rPr>
                         <a:t>npm config set registry http://registry.npm.taobao.org/</a:t>
                       </a:r>
-                      <a:endParaRPr lang="zh-CN" altLang="en-US" sz="1200"/>
+                      <a:endParaRPr lang="zh-CN" altLang="en-US" sz="1200" b="1"/>
                     </a:p>
                   </a:txBody>
                   <a:tcPr/>
@@ -9174,190 +9590,6 @@
 </p:sld>
 </file>
 
-<file path=ppt/slides/slide9.xml><?xml version="1.0" encoding="utf-8"?>
-<p:sld xmlns:a="http://schemas.openxmlformats.org/drawingml/2006/main" xmlns:r="http://schemas.openxmlformats.org/officeDocument/2006/relationships" xmlns:p="http://schemas.openxmlformats.org/presentationml/2006/main">
-  <p:cSld>
-    <p:spTree>
-      <p:nvGrpSpPr>
-        <p:cNvPr id="1" name=""/>
-        <p:cNvGrpSpPr/>
-        <p:nvPr/>
-      </p:nvGrpSpPr>
-      <p:grpSpPr/>
-      <p:sp>
-        <p:nvSpPr>
-          <p:cNvPr id="2" name="标题 1"/>
-          <p:cNvSpPr>
-            <a:spLocks noGrp="1"/>
-          </p:cNvSpPr>
-          <p:nvPr>
-            <p:ph type="title"/>
-          </p:nvPr>
-        </p:nvSpPr>
-        <p:spPr/>
-        <p:txBody>
-          <a:bodyPr/>
-          <a:p>
-            <a:r>
-              <a:rPr lang="en-US" altLang="zh-CN"/>
-              <a:t>Package Management - yarn</a:t>
-            </a:r>
-            <a:endParaRPr lang="en-US" altLang="zh-CN"/>
-          </a:p>
-        </p:txBody>
-      </p:sp>
-      <p:sp>
-        <p:nvSpPr>
-          <p:cNvPr id="3" name="内容占位符 2"/>
-          <p:cNvSpPr>
-            <a:spLocks noGrp="1"/>
-          </p:cNvSpPr>
-          <p:nvPr>
-            <p:ph idx="1"/>
-          </p:nvPr>
-        </p:nvSpPr>
-        <p:spPr/>
-        <p:txBody>
-          <a:bodyPr>
-            <a:normAutofit lnSpcReduction="10000"/>
-          </a:bodyPr>
-          <a:p>
-            <a:pPr lvl="0"/>
-            <a:r>
-              <a:rPr lang="en-US" altLang="zh-CN" sz="2400">
-                <a:sym typeface="+mn-ea"/>
-              </a:rPr>
-              <a:t>yarn</a:t>
-            </a:r>
-            <a:endParaRPr lang="en-US" altLang="zh-CN" sz="2400"/>
-          </a:p>
-          <a:p>
-            <a:pPr lvl="1"/>
-            <a:r>
-              <a:rPr lang="en-US" altLang="zh-CN">
-                <a:sym typeface="+mn-ea"/>
-              </a:rPr>
-              <a:t>cnpm i -g yarn</a:t>
-            </a:r>
-            <a:endParaRPr lang="en-US" altLang="zh-CN"/>
-          </a:p>
-          <a:p>
-            <a:pPr lvl="1"/>
-            <a:r>
-              <a:rPr lang="en-US" altLang="zh-CN">
-                <a:sym typeface="+mn-ea"/>
-              </a:rPr>
-              <a:t>yarn config set registry http://registry.npm.taobao.org</a:t>
-            </a:r>
-            <a:endParaRPr lang="en-US" altLang="zh-CN">
-              <a:sym typeface="+mn-ea"/>
-            </a:endParaRPr>
-          </a:p>
-          <a:p>
-            <a:pPr lvl="1"/>
-            <a:r>
-              <a:rPr lang="en-US" altLang="zh-CN">
-                <a:sym typeface="+mn-ea"/>
-              </a:rPr>
-              <a:t>yarn config set registry http://registry.yarnpkg.com</a:t>
-            </a:r>
-            <a:endParaRPr lang="en-US" altLang="zh-CN">
-              <a:sym typeface="+mn-ea"/>
-            </a:endParaRPr>
-          </a:p>
-          <a:p>
-            <a:pPr lvl="1"/>
-            <a:r>
-              <a:rPr lang="en-US" altLang="zh-CN"/>
-              <a:t>yarn config list</a:t>
-            </a:r>
-            <a:endParaRPr lang="en-US" altLang="zh-CN"/>
-          </a:p>
-          <a:p>
-            <a:pPr lvl="1"/>
-            <a:r>
-              <a:rPr lang="en-US" altLang="zh-CN"/>
-              <a:t>yarn install --verbose</a:t>
-            </a:r>
-            <a:endParaRPr lang="en-US" altLang="zh-CN"/>
-          </a:p>
-          <a:p>
-            <a:pPr lvl="1"/>
-            <a:r>
-              <a:rPr lang="en-US" altLang="zh-CN"/>
-              <a:t>yarn add &lt;package&gt;</a:t>
-            </a:r>
-            <a:endParaRPr lang="en-US" altLang="zh-CN"/>
-          </a:p>
-          <a:p>
-            <a:pPr lvl="1"/>
-            <a:r>
-              <a:rPr lang="en-US" altLang="zh-CN"/>
-              <a:t>yarn remove &lt;package&gt;</a:t>
-            </a:r>
-            <a:endParaRPr lang="en-US" altLang="zh-CN"/>
-          </a:p>
-          <a:p>
-            <a:pPr lvl="1"/>
-            <a:r>
-              <a:rPr lang="en-US" altLang="zh-CN"/>
-              <a:t>yarn cache clean</a:t>
-            </a:r>
-            <a:endParaRPr lang="en-US" altLang="zh-CN"/>
-          </a:p>
-          <a:p>
-            <a:pPr lvl="1"/>
-            <a:r>
-              <a:rPr lang="en-US" altLang="zh-CN"/>
-              <a:t>yarn list</a:t>
-            </a:r>
-            <a:endParaRPr lang="en-US" altLang="zh-CN"/>
-          </a:p>
-          <a:p>
-            <a:pPr lvl="2"/>
-            <a:r>
-              <a:rPr lang="en-US" altLang="zh-CN"/>
-              <a:t>list installed packages in tree style</a:t>
-            </a:r>
-            <a:endParaRPr lang="en-US" altLang="zh-CN"/>
-          </a:p>
-          <a:p>
-            <a:pPr lvl="2"/>
-            <a:r>
-              <a:rPr lang="en-US" altLang="zh-CN"/>
-              <a:t>yarn list --pattern jszip</a:t>
-            </a:r>
-            <a:endParaRPr lang="en-US" altLang="zh-CN"/>
-          </a:p>
-          <a:p>
-            <a:pPr lvl="1"/>
-            <a:r>
-              <a:rPr lang="en-US" altLang="zh-CN"/>
-              <a:t>yarn info &lt;package-name&gt; versions --json | jq '.data'</a:t>
-            </a:r>
-            <a:endParaRPr lang="en-US" altLang="zh-CN"/>
-          </a:p>
-          <a:p>
-            <a:pPr lvl="2"/>
-            <a:r>
-              <a:rPr lang="en-US" altLang="zh-CN"/>
-              <a:t>list all available versions for a package</a:t>
-            </a:r>
-            <a:endParaRPr lang="en-US" altLang="zh-CN"/>
-          </a:p>
-        </p:txBody>
-      </p:sp>
-    </p:spTree>
-    <p:custDataLst>
-      <p:tags r:id="rId1"/>
-    </p:custDataLst>
-  </p:cSld>
-  <p:clrMapOvr>
-    <a:masterClrMapping/>
-  </p:clrMapOvr>
-</p:sld>
-</file>
-
 <file path=ppt/tags/tag1.xml><?xml version="1.0" encoding="utf-8"?>
 <p:tagLst xmlns:p="http://schemas.openxmlformats.org/presentationml/2006/main">
   <p:tag name="KSO_WM_TAG_VERSION" val="1.0"/>
@@ -9392,16 +9624,16 @@
 
 <file path=ppt/tags/tag13.xml><?xml version="1.0" encoding="utf-8"?>
 <p:tagLst xmlns:p="http://schemas.openxmlformats.org/presentationml/2006/main">
-  <p:tag name="TABLE_ENDDRAG_ORIGIN_RECT" val="466*309"/>
-  <p:tag name="TABLE_ENDDRAG_RECT" val="465*86*466*309"/>
+  <p:tag name="KSO_WM_BEAUTIFY_FLAG" val="#wm#"/>
+  <p:tag name="KSO_WM_TEMPLATE_CATEGORY" val="custom"/>
+  <p:tag name="KSO_WM_TEMPLATE_INDEX" val="160402"/>
 </p:tagLst>
 </file>
 
 <file path=ppt/tags/tag14.xml><?xml version="1.0" encoding="utf-8"?>
 <p:tagLst xmlns:p="http://schemas.openxmlformats.org/presentationml/2006/main">
-  <p:tag name="KSO_WM_BEAUTIFY_FLAG" val="#wm#"/>
-  <p:tag name="KSO_WM_TEMPLATE_CATEGORY" val="custom"/>
-  <p:tag name="KSO_WM_TEMPLATE_INDEX" val="160402"/>
+  <p:tag name="TABLE_ENDDRAG_ORIGIN_RECT" val="466*309"/>
+  <p:tag name="TABLE_ENDDRAG_RECT" val="465*86*466*309"/>
 </p:tagLst>
 </file>
 
@@ -9519,6 +9751,32 @@
 
 <file path=ppt/tags/tag28.xml><?xml version="1.0" encoding="utf-8"?>
 <p:tagLst xmlns:p="http://schemas.openxmlformats.org/presentationml/2006/main">
+  <p:tag name="KSO_WM_BEAUTIFY_FLAG" val="#wm#"/>
+  <p:tag name="KSO_WM_TEMPLATE_CATEGORY" val="custom"/>
+  <p:tag name="KSO_WM_TEMPLATE_INDEX" val="160402"/>
+</p:tagLst>
+</file>
+
+<file path=ppt/tags/tag29.xml><?xml version="1.0" encoding="utf-8"?>
+<p:tagLst xmlns:p="http://schemas.openxmlformats.org/presentationml/2006/main">
+  <p:tag name="KSO_WM_BEAUTIFY_FLAG" val="#wm#"/>
+  <p:tag name="KSO_WM_TEMPLATE_CATEGORY" val="custom"/>
+  <p:tag name="KSO_WM_TEMPLATE_INDEX" val="160402"/>
+</p:tagLst>
+</file>
+
+<file path=ppt/tags/tag3.xml><?xml version="1.0" encoding="utf-8"?>
+<p:tagLst xmlns:p="http://schemas.openxmlformats.org/presentationml/2006/main">
+  <p:tag name="KSO_WM_TEMPLATE_THUMBS_INDEX" val="1、9、12、16、19、20、24、27、28"/>
+  <p:tag name="KSO_WM_TEMPLATE_CATEGORY" val="custom"/>
+  <p:tag name="KSO_WM_TEMPLATE_INDEX" val="160402"/>
+  <p:tag name="KSO_WM_TAG_VERSION" val="1.0"/>
+  <p:tag name="KSO_WM_BEAUTIFY_FLAG" val="#wm#"/>
+</p:tagLst>
+</file>
+
+<file path=ppt/tags/tag30.xml><?xml version="1.0" encoding="utf-8"?>
+<p:tagLst xmlns:p="http://schemas.openxmlformats.org/presentationml/2006/main">
   <p:tag name="KSO_WM_TAG_VERSION" val="1.0"/>
   <p:tag name="KSO_WM_BEAUTIFY_FLAG" val="#wm#"/>
   <p:tag name="KSO_WM_TEMPLATE_CATEGORY" val="custom"/>
@@ -9536,7 +9794,7 @@
 </p:tagLst>
 </file>
 
-<file path=ppt/tags/tag29.xml><?xml version="1.0" encoding="utf-8"?>
+<file path=ppt/tags/tag31.xml><?xml version="1.0" encoding="utf-8"?>
 <p:tagLst xmlns:p="http://schemas.openxmlformats.org/presentationml/2006/main">
   <p:tag name="KSO_WM_TAG_VERSION" val="1.0"/>
   <p:tag name="KSO_WM_BEAUTIFY_FLAG" val="#wm#"/>
@@ -9555,17 +9813,7 @@
 </p:tagLst>
 </file>
 
-<file path=ppt/tags/tag3.xml><?xml version="1.0" encoding="utf-8"?>
-<p:tagLst xmlns:p="http://schemas.openxmlformats.org/presentationml/2006/main">
-  <p:tag name="KSO_WM_TEMPLATE_THUMBS_INDEX" val="1、9、12、16、19、20、24、27、28"/>
-  <p:tag name="KSO_WM_TEMPLATE_CATEGORY" val="custom"/>
-  <p:tag name="KSO_WM_TEMPLATE_INDEX" val="160402"/>
-  <p:tag name="KSO_WM_TAG_VERSION" val="1.0"/>
-  <p:tag name="KSO_WM_BEAUTIFY_FLAG" val="#wm#"/>
-</p:tagLst>
-</file>
-
-<file path=ppt/tags/tag30.xml><?xml version="1.0" encoding="utf-8"?>
+<file path=ppt/tags/tag32.xml><?xml version="1.0" encoding="utf-8"?>
 <p:tagLst xmlns:p="http://schemas.openxmlformats.org/presentationml/2006/main">
   <p:tag name="KSO_WM_TEMPLATE_CATEGORY" val="custom"/>
   <p:tag name="KSO_WM_TEMPLATE_INDEX" val="160402"/>
@@ -9580,7 +9828,7 @@
 </p:tagLst>
 </file>
 
-<file path=ppt/tags/tag31.xml><?xml version="1.0" encoding="utf-8"?>
+<file path=ppt/tags/tag33.xml><?xml version="1.0" encoding="utf-8"?>
 <p:tagLst xmlns:p="http://schemas.openxmlformats.org/presentationml/2006/main">
   <p:tag name="COMMONDATA" val="eyJoZGlkIjoiYjRhZjQ5NWVmZmQxNmM3NmNkNDYxNWRmNzNmMjA1ZDAifQ=="/>
   <p:tag name="KSO_WPP_MARK_KEY" val="e2cf5ec0-0f92-446a-9169-3346f0c164cb"/>
